--- a/V2授课PPT/W15-第13次课-ResNet迁移学习（上.pptx
+++ b/V2授课PPT/W15-第13次课-ResNet迁移学习（上.pptx
@@ -42,6 +42,9 @@
     <p:sldId id="318" r:id="rId70"/>
     <p:sldId id="366" r:id="rId65"/>
     <p:sldId id="367" r:id="rId63"/>
+    <p:sldId id="368" r:id="rId61"/>
+    <p:sldId id="369" r:id="rId72"/>
+    <p:sldId id="370" r:id="rId59"/>
     <p:sldId id="365" r:id="rId66"/>
     <p:sldId id="319" r:id="rId71"/>
     <p:sldId id="321" r:id="rId73"/>
@@ -8124,7 +8127,7 @@
                 </a:solidFill>
                 <a:latin typeface="微软雅黑"/>
               </a:rPr>
-              <a:t>10 / 63</a:t>
+              <a:t>10 / 66</a:t>
             </a:r>
           </a:p>
         </p:txBody>
@@ -8979,7 +8982,7 @@
                 </a:solidFill>
                 <a:latin typeface="微软雅黑"/>
               </a:rPr>
-              <a:t>11 / 63</a:t>
+              <a:t>11 / 66</a:t>
             </a:r>
           </a:p>
         </p:txBody>
@@ -9465,7 +9468,7 @@
                 </a:solidFill>
                 <a:latin typeface="微软雅黑"/>
               </a:rPr>
-              <a:t>12 / 63</a:t>
+              <a:t>12 / 66</a:t>
             </a:r>
           </a:p>
         </p:txBody>
@@ -10408,7 +10411,7 @@
                 </a:solidFill>
                 <a:latin typeface="微软雅黑"/>
               </a:rPr>
-              <a:t>13 / 63</a:t>
+              <a:t>13 / 66</a:t>
             </a:r>
           </a:p>
         </p:txBody>
@@ -11114,7 +11117,7 @@
                 </a:solidFill>
                 <a:latin typeface="微软雅黑"/>
               </a:rPr>
-              <a:t>14 / 63</a:t>
+              <a:t>14 / 66</a:t>
             </a:r>
           </a:p>
         </p:txBody>
@@ -11820,7 +11823,7 @@
                 </a:solidFill>
                 <a:latin typeface="微软雅黑"/>
               </a:rPr>
-              <a:t>15 / 63</a:t>
+              <a:t>15 / 66</a:t>
             </a:r>
           </a:p>
         </p:txBody>
@@ -12526,7 +12529,7 @@
                 </a:solidFill>
                 <a:latin typeface="微软雅黑"/>
               </a:rPr>
-              <a:t>16 / 63</a:t>
+              <a:t>16 / 66</a:t>
             </a:r>
           </a:p>
         </p:txBody>
@@ -13232,7 +13235,7 @@
                 </a:solidFill>
                 <a:latin typeface="微软雅黑"/>
               </a:rPr>
-              <a:t>17 / 63</a:t>
+              <a:t>17 / 66</a:t>
             </a:r>
           </a:p>
         </p:txBody>
@@ -13706,7 +13709,7 @@
                 </a:solidFill>
                 <a:latin typeface="微软雅黑"/>
               </a:rPr>
-              <a:t>18 / 63</a:t>
+              <a:t>18 / 66</a:t>
             </a:r>
           </a:p>
         </p:txBody>
@@ -14412,7 +14415,7 @@
                 </a:solidFill>
                 <a:latin typeface="微软雅黑"/>
               </a:rPr>
-              <a:t>19 / 63</a:t>
+              <a:t>19 / 66</a:t>
             </a:r>
           </a:p>
         </p:txBody>
@@ -16140,7 +16143,7 @@
                 </a:solidFill>
                 <a:latin typeface="微软雅黑"/>
               </a:rPr>
-              <a:t>2 / 63</a:t>
+              <a:t>2 / 66</a:t>
             </a:r>
           </a:p>
         </p:txBody>
@@ -16995,7 +16998,7 @@
                 </a:solidFill>
                 <a:latin typeface="微软雅黑"/>
               </a:rPr>
-              <a:t>20 / 63</a:t>
+              <a:t>20 / 66</a:t>
             </a:r>
           </a:p>
         </p:txBody>
@@ -17965,7 +17968,7 @@
                 </a:solidFill>
                 <a:latin typeface="微软雅黑"/>
               </a:rPr>
-              <a:t>21 / 63</a:t>
+              <a:t>21 / 66</a:t>
             </a:r>
           </a:p>
         </p:txBody>
@@ -18935,7 +18938,7 @@
                 </a:solidFill>
                 <a:latin typeface="微软雅黑"/>
               </a:rPr>
-              <a:t>22 / 63</a:t>
+              <a:t>22 / 66</a:t>
             </a:r>
           </a:p>
         </p:txBody>
@@ -19905,7 +19908,7 @@
                 </a:solidFill>
                 <a:latin typeface="微软雅黑"/>
               </a:rPr>
-              <a:t>23 / 63</a:t>
+              <a:t>23 / 66</a:t>
             </a:r>
           </a:p>
         </p:txBody>
@@ -20875,7 +20878,7 @@
                 </a:solidFill>
                 <a:latin typeface="微软雅黑"/>
               </a:rPr>
-              <a:t>24 / 63</a:t>
+              <a:t>24 / 66</a:t>
             </a:r>
           </a:p>
         </p:txBody>
@@ -21411,7 +21414,7 @@
                 </a:solidFill>
                 <a:latin typeface="微软雅黑"/>
               </a:rPr>
-              <a:t>25 / 63</a:t>
+              <a:t>25 / 66</a:t>
             </a:r>
           </a:p>
         </p:txBody>
@@ -22381,7 +22384,7 @@
                 </a:solidFill>
                 <a:latin typeface="微软雅黑"/>
               </a:rPr>
-              <a:t>26 / 63</a:t>
+              <a:t>26 / 66</a:t>
             </a:r>
           </a:p>
         </p:txBody>
@@ -23351,7 +23354,7 @@
                 </a:solidFill>
                 <a:latin typeface="微软雅黑"/>
               </a:rPr>
-              <a:t>27 / 63</a:t>
+              <a:t>27 / 66</a:t>
             </a:r>
           </a:p>
         </p:txBody>
@@ -24323,7 +24326,7 @@
                 </a:solidFill>
                 <a:latin typeface="微软雅黑"/>
               </a:rPr>
-              <a:t>28 / 63</a:t>
+              <a:t>28 / 66</a:t>
             </a:r>
           </a:p>
         </p:txBody>
@@ -24786,7 +24789,7 @@
                 </a:solidFill>
                 <a:latin typeface="微软雅黑"/>
               </a:rPr>
-              <a:t>29 / 63</a:t>
+              <a:t>29 / 66</a:t>
             </a:r>
           </a:p>
         </p:txBody>
@@ -25578,7 +25581,7 @@
                 </a:solidFill>
                 <a:latin typeface="微软雅黑"/>
               </a:rPr>
-              <a:t>3 / 63</a:t>
+              <a:t>3 / 66</a:t>
             </a:r>
           </a:p>
         </p:txBody>
@@ -26022,7 +26025,7 @@
                 </a:solidFill>
                 <a:latin typeface="微软雅黑"/>
               </a:rPr>
-              <a:t>30 / 63</a:t>
+              <a:t>30 / 66</a:t>
             </a:r>
           </a:p>
         </p:txBody>
@@ -27066,7 +27069,7 @@
                 </a:solidFill>
                 <a:latin typeface="微软雅黑"/>
               </a:rPr>
-              <a:t>31 / 63</a:t>
+              <a:t>31 / 66</a:t>
             </a:r>
           </a:p>
         </p:txBody>
@@ -27921,7 +27924,7 @@
                 </a:solidFill>
                 <a:latin typeface="微软雅黑"/>
               </a:rPr>
-              <a:t>32 / 63</a:t>
+              <a:t>32 / 66</a:t>
             </a:r>
           </a:p>
         </p:txBody>
@@ -29989,7 +29992,7 @@
                 </a:solidFill>
                 <a:latin typeface="微软雅黑"/>
               </a:rPr>
-              <a:t>33 / 63</a:t>
+              <a:t>33 / 66</a:t>
             </a:r>
           </a:p>
         </p:txBody>
@@ -30781,7 +30784,7 @@
                 </a:solidFill>
                 <a:latin typeface="微软雅黑"/>
               </a:rPr>
-              <a:t>34 / 63</a:t>
+              <a:t>34 / 66</a:t>
             </a:r>
           </a:p>
         </p:txBody>
@@ -31452,7 +31455,7 @@
                 </a:solidFill>
                 <a:latin typeface="微软雅黑"/>
               </a:rPr>
-              <a:t>35 / 63</a:t>
+              <a:t>35 / 66</a:t>
             </a:r>
           </a:p>
         </p:txBody>
@@ -31728,7 +31731,7 @@
                 </a:solidFill>
                 <a:latin typeface="微软雅黑"/>
               </a:rPr>
-              <a:t>36 / 63</a:t>
+              <a:t>36 / 66</a:t>
             </a:r>
           </a:p>
         </p:txBody>
@@ -31900,127 +31903,97 @@
                   <a:srgbClr val="0545E8"/>
                 </a:solidFill>
               </a:rPr>
-              <a:t>① 参考实现真实运行输出（本工单完成态）</a:t>
-            </a:r>
-          </a:p>
-          <a:p>
-            <a:pPr algn="l">
-              <a:spcBef>
-                <a:spcPts val="100"/>
-              </a:spcBef>
-            </a:pPr>
-            <a:r>
-              <a:rPr sz="1000" b="0">
-                <a:solidFill>
-                  <a:srgbClr val="010328"/>
-                </a:solidFill>
-              </a:rPr>
-              <a:t>=== 工单 M3-1 ResNet迁移学习（概念版）· 完成态 ===</a:t>
-            </a:r>
-          </a:p>
-          <a:p>
-            <a:pPr algn="l">
-              <a:spcBef>
-                <a:spcPts val="100"/>
-              </a:spcBef>
-            </a:pPr>
-            <a:r>
-              <a:rPr sz="1000" b="0">
-                <a:solidFill>
-                  <a:srgbClr val="010328"/>
-                </a:solidFill>
-              </a:rPr>
-              <a:t>世界: 海量无标注 2000 条 / 少量标注 16 条 / 测试 200 条</a:t>
-            </a:r>
-          </a:p>
-          <a:p>
-            <a:pPr algn="l">
-              <a:spcBef>
-                <a:spcPts val="100"/>
-              </a:spcBef>
-            </a:pPr>
-            <a:r>
-              <a:rPr sz="1000" b="0">
-                <a:solidFill>
-                  <a:srgbClr val="010328"/>
-                </a:solidFill>
-              </a:rPr>
-              <a:t>预训练特征提取器: PCA(8维) 在海量数据上一次性学成并**冻结**</a:t>
-            </a:r>
-          </a:p>
-          <a:p>
-            <a:pPr algn="l">
-              <a:spcBef>
-                <a:spcPts val="100"/>
-              </a:spcBef>
-            </a:pPr>
-            <a:r>
-              <a:rPr sz="1000" b="0">
-                <a:solidFill>
-                  <a:srgbClr val="010328"/>
-                </a:solidFill>
-              </a:rPr>
-              <a:t>  冻结特征累计解释方差 = 0.330</a:t>
-            </a:r>
-          </a:p>
-          <a:p>
-            <a:pPr algn="l">
-              <a:spcBef>
-                <a:spcPts val="100"/>
-              </a:spcBef>
-            </a:pPr>
-            <a:r>
-              <a:rPr sz="1000" b="0">
-                <a:solidFill>
-                  <a:srgbClr val="010328"/>
-                </a:solidFill>
-              </a:rPr>
-              <a:t>对照（16条样本直连 192 维训头）: 测试准确率 = 0.915</a:t>
-            </a:r>
-          </a:p>
-          <a:p>
-            <a:pPr algn="l">
-              <a:spcBef>
-                <a:spcPts val="100"/>
-              </a:spcBef>
-            </a:pPr>
-            <a:r>
-              <a:rPr sz="1000" b="0">
-                <a:solidFill>
-                  <a:srgbClr val="010328"/>
-                </a:solidFill>
-              </a:rPr>
-              <a:t>迁移（冻结8维特征 + 只训分类头）: 测试准确率 = 0.960</a:t>
-            </a:r>
-          </a:p>
-          <a:p>
-            <a:pPr algn="l">
-              <a:spcBef>
-                <a:spcPts val="100"/>
-              </a:spcBef>
-            </a:pPr>
-            <a:r>
-              <a:rPr sz="1000" b="0">
-                <a:solidFill>
-                  <a:srgbClr val="010328"/>
-                </a:solidFill>
-              </a:rPr>
-              <a:t>增益 = +0.045 → 迁移显著胜出，预训练特征是维度灾难的解药</a:t>
-            </a:r>
-          </a:p>
-          <a:p>
-            <a:pPr algn="l">
-              <a:spcBef>
-                <a:spcPts val="100"/>
-              </a:spcBef>
-            </a:pPr>
-            <a:r>
-              <a:rPr sz="1000" b="0">
-                <a:solidFill>
-                  <a:srgbClr val="010328"/>
-                </a:solidFill>
-              </a:rPr>
-              <a:t>结论: 真实规律仅藏在少数测点维（其余为环境噪声维）；冻结+小样本头 是 ResNet 微调思想的最小可运行模型。</a:t>
+              <a:t>① 本次真跑实测输出（逐字取自 output/report.txt）</a:t>
+            </a:r>
+          </a:p>
+          <a:p>
+            <a:r>
+              <a:rPr sz="1400" b="1">
+                <a:solidFill>
+                  <a:srgbClr val="0545E8"/>
+                </a:solidFill>
+              </a:rPr>
+              <a:t>实测达成档位: 优(A) ｜ 实测最优准确率 1.0000 ｜ 规范率 97.39% ｜ 对照表实测行 4 条 ｜ 增强增益 冻结 -0.0050/微调 +0.4850 ｜ 决策记录 1 条 ｜ 曲线 1 张</a:t>
+            </a:r>
+          </a:p>
+          <a:p>
+            <a:r>
+              <a:rPr sz="1400" b="1">
+                <a:solidFill>
+                  <a:srgbClr val="0545E8"/>
+                </a:solidFill>
+              </a:rPr>
+              <a:t>及格(D)    规范率门槛≥70% [达标] ｜ 功能OK ｜ 准确率门槛≥0.7（实测 1.0000）</a:t>
+            </a:r>
+          </a:p>
+          <a:p>
+            <a:r>
+              <a:rPr sz="1400" b="1">
+                <a:solidFill>
+                  <a:srgbClr val="0545E8"/>
+                </a:solidFill>
+              </a:rPr>
+              <a:t>良好(C)    规范率门槛≥70% [达标] ｜ 功能OK ｜ 准确率≥0.75 且对照行≥2（实测 1.0000 / 4 行）</a:t>
+            </a:r>
+          </a:p>
+          <a:p>
+            <a:r>
+              <a:rPr sz="1400" b="1">
+                <a:solidFill>
+                  <a:srgbClr val="0545E8"/>
+                </a:solidFill>
+              </a:rPr>
+              <a:t>优秀(B)    规范率门槛≥70% [达标] ｜ 功能OK ｜ 准确率≥0.8 或增强有效（增益见上行）且决策记录≥1（实测 1）</a:t>
+            </a:r>
+          </a:p>
+          <a:p>
+            <a:r>
+              <a:rPr sz="1400" b="1">
+                <a:solidFill>
+                  <a:srgbClr val="0545E8"/>
+                </a:solidFill>
+              </a:rPr>
+              <a:t>优(A)     规范率门槛≥70% [达标] ｜ 功能OK ｜ 准确率≥0.85 且有训练曲线（实测 1.0000 / 1 张）</a:t>
+            </a:r>
+          </a:p>
+          <a:p>
+            <a:r>
+              <a:rPr sz="1400" b="1">
+                <a:solidFill>
+                  <a:srgbClr val="0545E8"/>
+                </a:solidFill>
+              </a:rPr>
+              <a:t>人工答辩项 3 条，教师答辩时确认：</a:t>
+            </a:r>
+          </a:p>
+          <a:p>
+            <a:r>
+              <a:rPr sz="1400" b="1">
+                <a:solidFill>
+                  <a:srgbClr val="0545E8"/>
+                </a:solidFill>
+              </a:rPr>
+              <a:t>- 决策结论与理由的口头陈述（工单：答辩必答）</a:t>
+            </a:r>
+          </a:p>
+          <a:p>
+            <a:r>
+              <a:rPr sz="1400" b="1">
+                <a:solidFill>
+                  <a:srgbClr val="0545E8"/>
+                </a:solidFill>
+              </a:rPr>
+              <a:t>- 企业元验收栏签认（功能可用/参数留痕/数据可信，值班师傅签字）</a:t>
+            </a:r>
+          </a:p>
+          <a:p>
+            <a:r>
+              <a:rPr sz="1400" b="1">
+                <a:solidFill>
+                  <a:srgbClr val="0545E8"/>
+                </a:solidFill>
+              </a:rPr>
+              <a:t>- 底座口径是否可接受（真ResNet=本地缓存离线载入 / 兜底=本地CNN，实测证据见报告底座口径段）</a:t>
             </a:r>
           </a:p>
         </p:txBody>
@@ -32394,7 +32367,7 @@
                 </a:solidFill>
                 <a:latin typeface="微软雅黑"/>
               </a:rPr>
-              <a:t>37 / 63</a:t>
+              <a:t>37 / 66</a:t>
             </a:r>
           </a:p>
         </p:txBody>
@@ -33009,7 +32982,7 @@
                 </a:solidFill>
                 <a:latin typeface="微软雅黑"/>
               </a:rPr>
-              <a:t>38 / 63</a:t>
+              <a:t>41 / 66</a:t>
             </a:r>
           </a:p>
         </p:txBody>
@@ -34163,7 +34136,7 @@
         <p:spPr>
           <a:xfrm>
             <a:off x="940000" y="5720000"/>
-            <a:ext cx="10500000" cy="520000"/>
+            <a:ext cx="10500000" cy="731520"/>
           </a:xfrm>
           <a:prstGeom prst="rect">
             <a:avLst/>
@@ -34185,13 +34158,24 @@
               </a:spcAft>
             </a:pPr>
             <a:r>
-              <a:rPr sz="1350" b="1">
+              <a:rPr sz="1050" b="1">
                 <a:solidFill>
                   <a:srgbClr val="010328"/>
                 </a:solidFill>
                 <a:latin typeface="微软雅黑"/>
               </a:rPr>
               <a:t>✔ 达标标准: 准确率≥70%</a:t>
+            </a:r>
+          </a:p>
+          <a:p>
+            <a:r>
+              <a:rPr sz="1050" b="1">
+                <a:solidFill>
+                  <a:srgbClr val="010328"/>
+                </a:solidFill>
+                <a:latin typeface="微软雅黑"/>
+              </a:rPr>
+              <a:t>✓ 本次实测达标 ｜ 规范率门槛≥70% [达标] ｜ 功能OK</a:t>
             </a:r>
           </a:p>
         </p:txBody>
@@ -34319,7 +34303,7 @@
                 </a:solidFill>
                 <a:latin typeface="微软雅黑"/>
               </a:rPr>
-              <a:t>39 / 63</a:t>
+              <a:t>42 / 66</a:t>
             </a:r>
           </a:p>
         </p:txBody>
@@ -35174,7 +35158,7 @@
                 </a:solidFill>
                 <a:latin typeface="微软雅黑"/>
               </a:rPr>
-              <a:t>4 / 63</a:t>
+              <a:t>4 / 66</a:t>
             </a:r>
           </a:p>
         </p:txBody>
@@ -35938,7 +35922,7 @@
         <p:spPr>
           <a:xfrm>
             <a:off x="940000" y="5720000"/>
-            <a:ext cx="10500000" cy="520000"/>
+            <a:ext cx="10500000" cy="731520"/>
           </a:xfrm>
           <a:prstGeom prst="rect">
             <a:avLst/>
@@ -35960,13 +35944,24 @@
               </a:spcAft>
             </a:pPr>
             <a:r>
-              <a:rPr sz="1350" b="1">
+              <a:rPr sz="1050" b="1">
                 <a:solidFill>
                   <a:srgbClr val="010328"/>
                 </a:solidFill>
                 <a:latin typeface="微软雅黑"/>
               </a:rPr>
               <a:t>✔ 达标标准: 准确率≥75%加对照表</a:t>
+            </a:r>
+          </a:p>
+          <a:p>
+            <a:r>
+              <a:rPr sz="1050" b="1">
+                <a:solidFill>
+                  <a:srgbClr val="010328"/>
+                </a:solidFill>
+                <a:latin typeface="微软雅黑"/>
+              </a:rPr>
+              <a:t>✓ 本次实测达标 ｜ 规范率门槛≥70% [达标] ｜ 功能OK</a:t>
             </a:r>
           </a:p>
         </p:txBody>
@@ -36094,7 +36089,7 @@
                 </a:solidFill>
                 <a:latin typeface="微软雅黑"/>
               </a:rPr>
-              <a:t>40 / 63</a:t>
+              <a:t>43 / 66</a:t>
             </a:r>
           </a:p>
         </p:txBody>
@@ -36858,7 +36853,7 @@
         <p:spPr>
           <a:xfrm>
             <a:off x="940000" y="5720000"/>
-            <a:ext cx="10500000" cy="520000"/>
+            <a:ext cx="10500000" cy="731520"/>
           </a:xfrm>
           <a:prstGeom prst="rect">
             <a:avLst/>
@@ -36880,13 +36875,24 @@
               </a:spcAft>
             </a:pPr>
             <a:r>
-              <a:rPr sz="1350" b="1">
+              <a:rPr sz="1050" b="1">
                 <a:solidFill>
                   <a:srgbClr val="010328"/>
                 </a:solidFill>
                 <a:latin typeface="微软雅黑"/>
               </a:rPr>
               <a:t>✔ 达标标准: ≥80%或增强有效论证</a:t>
+            </a:r>
+          </a:p>
+          <a:p>
+            <a:r>
+              <a:rPr sz="1050" b="1">
+                <a:solidFill>
+                  <a:srgbClr val="010328"/>
+                </a:solidFill>
+                <a:latin typeface="微软雅黑"/>
+              </a:rPr>
+              <a:t>✓ 本次实测达标 ｜ 规范率门槛≥70% [达标] ｜ 功能OK</a:t>
             </a:r>
           </a:p>
         </p:txBody>
@@ -37014,7 +37020,7 @@
                 </a:solidFill>
                 <a:latin typeface="微软雅黑"/>
               </a:rPr>
-              <a:t>41 / 63</a:t>
+              <a:t>44 / 66</a:t>
             </a:r>
           </a:p>
         </p:txBody>
@@ -37778,7 +37784,7 @@
         <p:spPr>
           <a:xfrm>
             <a:off x="940000" y="5720000"/>
-            <a:ext cx="10500000" cy="520000"/>
+            <a:ext cx="10500000" cy="731520"/>
           </a:xfrm>
           <a:prstGeom prst="rect">
             <a:avLst/>
@@ -37800,13 +37806,24 @@
               </a:spcAft>
             </a:pPr>
             <a:r>
-              <a:rPr sz="1350" b="1">
+              <a:rPr sz="1050" b="1">
                 <a:solidFill>
                   <a:srgbClr val="010328"/>
                 </a:solidFill>
                 <a:latin typeface="微软雅黑"/>
               </a:rPr>
               <a:t>✔ 达标标准: 准确率≥85%加曲线</a:t>
+            </a:r>
+          </a:p>
+          <a:p>
+            <a:r>
+              <a:rPr sz="1050" b="1">
+                <a:solidFill>
+                  <a:srgbClr val="010328"/>
+                </a:solidFill>
+                <a:latin typeface="微软雅黑"/>
+              </a:rPr>
+              <a:t>✓ 本次实测达标 ｜ 规范率门槛≥70% [达标] ｜ 功能OK</a:t>
             </a:r>
           </a:p>
         </p:txBody>
@@ -37934,7 +37951,7 @@
                 </a:solidFill>
                 <a:latin typeface="微软雅黑"/>
               </a:rPr>
-              <a:t>42 / 63</a:t>
+              <a:t>45 / 66</a:t>
             </a:r>
           </a:p>
         </p:txBody>
@@ -38858,7 +38875,7 @@
                 </a:solidFill>
                 <a:latin typeface="微软雅黑"/>
               </a:rPr>
-              <a:t>43 / 63</a:t>
+              <a:t>46 / 66</a:t>
             </a:r>
           </a:p>
         </p:txBody>
@@ -40030,7 +40047,7 @@
                 </a:solidFill>
                 <a:latin typeface="微软雅黑"/>
               </a:rPr>
-              <a:t>44 / 63</a:t>
+              <a:t>47 / 66</a:t>
             </a:r>
           </a:p>
         </p:txBody>
@@ -40822,7 +40839,7 @@
                 </a:solidFill>
                 <a:latin typeface="微软雅黑"/>
               </a:rPr>
-              <a:t>45 / 63</a:t>
+              <a:t>48 / 66</a:t>
             </a:r>
           </a:p>
         </p:txBody>
@@ -41614,7 +41631,7 @@
                 </a:solidFill>
                 <a:latin typeface="微软雅黑"/>
               </a:rPr>
-              <a:t>46 / 63</a:t>
+              <a:t>49 / 66</a:t>
             </a:r>
           </a:p>
         </p:txBody>
@@ -42469,7 +42486,7 @@
                 </a:solidFill>
                 <a:latin typeface="微软雅黑"/>
               </a:rPr>
-              <a:t>47 / 63</a:t>
+              <a:t>50 / 66</a:t>
             </a:r>
           </a:p>
         </p:txBody>
@@ -43177,7 +43194,7 @@
                 </a:solidFill>
                 <a:latin typeface="微软雅黑"/>
               </a:rPr>
-              <a:t>48 / 63</a:t>
+              <a:t>51 / 66</a:t>
             </a:r>
           </a:p>
         </p:txBody>
@@ -43817,7 +43834,7 @@
                 </a:solidFill>
                 <a:latin typeface="微软雅黑"/>
               </a:rPr>
-              <a:t>49 / 63</a:t>
+              <a:t>52 / 66</a:t>
             </a:r>
           </a:p>
         </p:txBody>
@@ -44789,7 +44806,7 @@
                 </a:solidFill>
                 <a:latin typeface="微软雅黑"/>
               </a:rPr>
-              <a:t>5 / 63</a:t>
+              <a:t>5 / 66</a:t>
             </a:r>
           </a:p>
         </p:txBody>
@@ -45761,7 +45778,7 @@
                 </a:solidFill>
                 <a:latin typeface="微软雅黑"/>
               </a:rPr>
-              <a:t>50 / 63</a:t>
+              <a:t>53 / 66</a:t>
             </a:r>
           </a:p>
         </p:txBody>
@@ -46553,7 +46570,7 @@
                 </a:solidFill>
                 <a:latin typeface="微软雅黑"/>
               </a:rPr>
-              <a:t>51 / 63</a:t>
+              <a:t>54 / 66</a:t>
             </a:r>
           </a:p>
         </p:txBody>
@@ -48185,7 +48202,7 @@
                 </a:solidFill>
                 <a:latin typeface="微软雅黑"/>
               </a:rPr>
-              <a:t>52 / 63</a:t>
+              <a:t>55 / 66</a:t>
             </a:r>
           </a:p>
         </p:txBody>
@@ -48983,7 +49000,7 @@
                 </a:solidFill>
                 <a:latin typeface="微软雅黑"/>
               </a:rPr>
-              <a:t>53 / 63</a:t>
+              <a:t>56 / 66</a:t>
             </a:r>
           </a:p>
         </p:txBody>
@@ -50129,7 +50146,7 @@
                 </a:solidFill>
                 <a:latin typeface="微软雅黑"/>
               </a:rPr>
-              <a:t>54 / 63</a:t>
+              <a:t>57 / 66</a:t>
             </a:r>
           </a:p>
         </p:txBody>
@@ -50982,7 +50999,7 @@
                 </a:solidFill>
                 <a:latin typeface="微软雅黑"/>
               </a:rPr>
-              <a:t>55 / 63</a:t>
+              <a:t>58 / 66</a:t>
             </a:r>
           </a:p>
         </p:txBody>
@@ -51954,7 +51971,7 @@
                 </a:solidFill>
                 <a:latin typeface="微软雅黑"/>
               </a:rPr>
-              <a:t>56 / 63</a:t>
+              <a:t>59 / 66</a:t>
             </a:r>
           </a:p>
         </p:txBody>
@@ -52926,7 +52943,7 @@
                 </a:solidFill>
                 <a:latin typeface="微软雅黑"/>
               </a:rPr>
-              <a:t>57 / 63</a:t>
+              <a:t>60 / 66</a:t>
             </a:r>
           </a:p>
         </p:txBody>
@@ -53898,7 +53915,7 @@
                 </a:solidFill>
                 <a:latin typeface="微软雅黑"/>
               </a:rPr>
-              <a:t>58 / 63</a:t>
+              <a:t>61 / 66</a:t>
             </a:r>
           </a:p>
         </p:txBody>
@@ -55157,7 +55174,7 @@
                 </a:solidFill>
                 <a:latin typeface="微软雅黑"/>
               </a:rPr>
-              <a:t>59 / 63</a:t>
+              <a:t>62 / 66</a:t>
             </a:r>
           </a:p>
         </p:txBody>
@@ -56625,7 +56642,7 @@
                 </a:solidFill>
                 <a:latin typeface="微软雅黑"/>
               </a:rPr>
-              <a:t>6 / 63</a:t>
+              <a:t>6 / 66</a:t>
             </a:r>
           </a:p>
         </p:txBody>
@@ -57417,7 +57434,7 @@
                 </a:solidFill>
                 <a:latin typeface="微软雅黑"/>
               </a:rPr>
-              <a:t>60 / 63</a:t>
+              <a:t>63 / 66</a:t>
             </a:r>
           </a:p>
         </p:txBody>
@@ -58123,7 +58140,7 @@
                 </a:solidFill>
                 <a:latin typeface="微软雅黑"/>
               </a:rPr>
-              <a:t>61 / 63</a:t>
+              <a:t>64 / 66</a:t>
             </a:r>
           </a:p>
         </p:txBody>
@@ -58483,7 +58500,7 @@
                 </a:solidFill>
                 <a:latin typeface="微软雅黑"/>
               </a:rPr>
-              <a:t>62 / 63</a:t>
+              <a:t>65 / 66</a:t>
             </a:r>
           </a:p>
         </p:txBody>
@@ -58854,6 +58871,2590 @@
 </p:sld>
 </file>
 
+<file path=ppt/slides/slide64.xml><?xml version="1.0" encoding="utf-8"?>
+<p:sld xmlns:a="http://schemas.openxmlformats.org/drawingml/2006/main" xmlns:p="http://schemas.openxmlformats.org/presentationml/2006/main" xmlns:r="http://schemas.openxmlformats.org/officeDocument/2006/relationships">
+  <p:cSld>
+    <p:spTree>
+      <p:nvGrpSpPr>
+        <p:cNvPr id="1" name=""/>
+        <p:cNvGrpSpPr/>
+        <p:nvPr/>
+      </p:nvGrpSpPr>
+      <p:grpSpPr/>
+      <p:sp>
+        <p:nvSpPr>
+          <p:cNvPr id="2" name="Rectangle 1"/>
+          <p:cNvSpPr/>
+          <p:nvPr/>
+        </p:nvSpPr>
+        <p:spPr>
+          <a:xfrm>
+            <a:off x="0" y="0"/>
+            <a:ext cx="12192000" cy="1150000"/>
+          </a:xfrm>
+          <a:prstGeom prst="rect">
+            <a:avLst/>
+          </a:prstGeom>
+          <a:solidFill>
+            <a:srgbClr val="010328"/>
+          </a:solidFill>
+          <a:ln>
+            <a:noFill/>
+          </a:ln>
+          <a:effectLst/>
+        </p:spPr>
+        <p:style>
+          <a:lnRef idx="1">
+            <a:schemeClr val="accent1"/>
+          </a:lnRef>
+          <a:fillRef idx="3">
+            <a:schemeClr val="accent1"/>
+          </a:fillRef>
+          <a:effectRef idx="2">
+            <a:schemeClr val="accent1"/>
+          </a:effectRef>
+          <a:fontRef idx="minor">
+            <a:schemeClr val="lt1"/>
+          </a:fontRef>
+        </p:style>
+        <p:txBody>
+          <a:bodyPr rtlCol="0" anchor="ctr"/>
+          <a:lstStyle/>
+          <a:p>
+            <a:pPr algn="ctr"/>
+          </a:p>
+        </p:txBody>
+      </p:sp>
+      <p:sp>
+        <p:nvSpPr>
+          <p:cNvPr id="3" name="Rectangle 2"/>
+          <p:cNvSpPr/>
+          <p:nvPr/>
+        </p:nvSpPr>
+        <p:spPr>
+          <a:xfrm>
+            <a:off x="0" y="1150000"/>
+            <a:ext cx="2600000" cy="70000"/>
+          </a:xfrm>
+          <a:prstGeom prst="rect">
+            <a:avLst/>
+          </a:prstGeom>
+          <a:solidFill>
+            <a:srgbClr val="F5670F"/>
+          </a:solidFill>
+          <a:ln>
+            <a:noFill/>
+          </a:ln>
+          <a:effectLst/>
+        </p:spPr>
+        <p:style>
+          <a:lnRef idx="1">
+            <a:schemeClr val="accent1"/>
+          </a:lnRef>
+          <a:fillRef idx="3">
+            <a:schemeClr val="accent1"/>
+          </a:fillRef>
+          <a:effectRef idx="2">
+            <a:schemeClr val="accent1"/>
+          </a:effectRef>
+          <a:fontRef idx="minor">
+            <a:schemeClr val="lt1"/>
+          </a:fontRef>
+        </p:style>
+        <p:txBody>
+          <a:bodyPr rtlCol="0" anchor="ctr"/>
+          <a:lstStyle/>
+          <a:p>
+            <a:pPr algn="ctr"/>
+          </a:p>
+        </p:txBody>
+      </p:sp>
+      <p:sp>
+        <p:nvSpPr>
+          <p:cNvPr id="4" name="TextBox 3"/>
+          <p:cNvSpPr txBox="1"/>
+          <p:nvPr/>
+        </p:nvSpPr>
+        <p:spPr>
+          <a:xfrm>
+            <a:off x="700000" y="300000"/>
+            <a:ext cx="10792000" cy="700000"/>
+          </a:xfrm>
+          <a:prstGeom prst="rect">
+            <a:avLst/>
+          </a:prstGeom>
+          <a:noFill/>
+        </p:spPr>
+        <p:txBody>
+          <a:bodyPr wrap="square" anchor="t">
+            <a:spAutoFit/>
+          </a:bodyPr>
+          <a:lstStyle/>
+          <a:p>
+            <a:pPr algn="l">
+              <a:lnSpc>
+                <a:spcPct val="110000"/>
+              </a:lnSpc>
+              <a:spcAft>
+                <a:spcPts val="600"/>
+              </a:spcAft>
+            </a:pPr>
+            <a:r>
+              <a:rPr sz="2400" b="1">
+                <a:solidFill>
+                  <a:srgbClr val="FFFFFF"/>
+                </a:solidFill>
+                <a:latin typeface="微软雅黑"/>
+              </a:rPr>
+              <a:t>实测验收 · m31_transfer</a:t>
+            </a:r>
+          </a:p>
+        </p:txBody>
+      </p:sp>
+      <p:sp>
+        <p:nvSpPr>
+          <p:cNvPr id="11" name="Rectangle 10"/>
+          <p:cNvSpPr/>
+          <p:nvPr/>
+        </p:nvSpPr>
+        <p:spPr>
+          <a:xfrm>
+            <a:off x="500000" y="6500000"/>
+            <a:ext cx="11100000" cy="20000"/>
+          </a:xfrm>
+          <a:prstGeom prst="rect">
+            <a:avLst/>
+          </a:prstGeom>
+          <a:solidFill>
+            <a:srgbClr val="C9D4EE"/>
+          </a:solidFill>
+          <a:ln>
+            <a:noFill/>
+          </a:ln>
+          <a:effectLst/>
+        </p:spPr>
+        <p:style>
+          <a:lnRef idx="1">
+            <a:schemeClr val="accent1"/>
+          </a:lnRef>
+          <a:fillRef idx="3">
+            <a:schemeClr val="accent1"/>
+          </a:fillRef>
+          <a:effectRef idx="2">
+            <a:schemeClr val="accent1"/>
+          </a:effectRef>
+          <a:fontRef idx="minor">
+            <a:schemeClr val="lt1"/>
+          </a:fontRef>
+        </p:style>
+        <p:txBody>
+          <a:bodyPr rtlCol="0" anchor="ctr"/>
+          <a:lstStyle/>
+          <a:p>
+            <a:pPr algn="ctr"/>
+          </a:p>
+        </p:txBody>
+      </p:sp>
+      <p:sp>
+        <p:nvSpPr>
+          <p:cNvPr id="12" name="TextBox 11"/>
+          <p:cNvSpPr txBox="1"/>
+          <p:nvPr/>
+        </p:nvSpPr>
+        <p:spPr>
+          <a:xfrm>
+            <a:off x="500000" y="6540000"/>
+            <a:ext cx="7000000" cy="300000"/>
+          </a:xfrm>
+          <a:prstGeom prst="rect">
+            <a:avLst/>
+          </a:prstGeom>
+          <a:noFill/>
+        </p:spPr>
+        <p:txBody>
+          <a:bodyPr wrap="square" anchor="t">
+            <a:spAutoFit/>
+          </a:bodyPr>
+          <a:lstStyle/>
+          <a:p>
+            <a:pPr algn="l">
+              <a:lnSpc>
+                <a:spcPct val="110000"/>
+              </a:lnSpc>
+              <a:spcAft>
+                <a:spcPts val="600"/>
+              </a:spcAft>
+            </a:pPr>
+            <a:r>
+              <a:rPr sz="1000" b="0">
+                <a:solidFill>
+                  <a:srgbClr val="8A97B5"/>
+                </a:solidFill>
+                <a:latin typeface="微软雅黑"/>
+              </a:rPr>
+              <a:t>两江智造集团 · AI应用基础48课时版</a:t>
+            </a:r>
+          </a:p>
+        </p:txBody>
+      </p:sp>
+      <p:sp>
+        <p:nvSpPr>
+          <p:cNvPr id="13" name="TextBox 12"/>
+          <p:cNvSpPr txBox="1"/>
+          <p:nvPr/>
+        </p:nvSpPr>
+        <p:spPr>
+          <a:xfrm>
+            <a:off x="10600000" y="6540000"/>
+            <a:ext cx="1000000" cy="300000"/>
+          </a:xfrm>
+          <a:prstGeom prst="rect">
+            <a:avLst/>
+          </a:prstGeom>
+          <a:noFill/>
+        </p:spPr>
+        <p:txBody>
+          <a:bodyPr wrap="square" anchor="t">
+            <a:spAutoFit/>
+          </a:bodyPr>
+          <a:lstStyle/>
+          <a:p>
+            <a:pPr algn="r">
+              <a:lnSpc>
+                <a:spcPct val="110000"/>
+              </a:lnSpc>
+              <a:spcAft>
+                <a:spcPts val="600"/>
+              </a:spcAft>
+            </a:pPr>
+            <a:r>
+              <a:rPr sz="1000" b="0">
+                <a:solidFill>
+                  <a:srgbClr val="8A97B5"/>
+                </a:solidFill>
+                <a:latin typeface="微软雅黑"/>
+              </a:rPr>
+              <a:t>38 / 66</a:t>
+            </a:r>
+          </a:p>
+        </p:txBody>
+      </p:sp>
+      <p:sp>
+        <p:nvSpPr>
+          <p:cNvPr id="14" name="Rectangle 13"/>
+          <p:cNvSpPr/>
+          <p:nvPr/>
+        </p:nvSpPr>
+        <p:spPr>
+          <a:xfrm>
+            <a:off x="0" y="1371600"/>
+            <a:ext cx="12188952" cy="713232"/>
+          </a:xfrm>
+          <a:prstGeom prst="rect">
+            <a:avLst/>
+          </a:prstGeom>
+          <a:solidFill>
+            <a:srgbClr val="F2F5F9"/>
+          </a:solidFill>
+          <a:ln>
+            <a:noFill/>
+          </a:ln>
+          <a:effectLst/>
+        </p:spPr>
+        <p:style>
+          <a:lnRef idx="1">
+            <a:schemeClr val="accent1"/>
+          </a:lnRef>
+          <a:fillRef idx="3">
+            <a:schemeClr val="accent1"/>
+          </a:fillRef>
+          <a:effectRef idx="2">
+            <a:schemeClr val="accent1"/>
+          </a:effectRef>
+          <a:fontRef idx="minor">
+            <a:schemeClr val="lt1"/>
+          </a:fontRef>
+        </p:style>
+        <p:txBody>
+          <a:bodyPr rtlCol="0" anchor="ctr" wrap="square"/>
+          <a:lstStyle/>
+          <a:p>
+            <a:pPr algn="ctr"/>
+          </a:p>
+        </p:txBody>
+      </p:sp>
+      <p:sp>
+        <p:nvSpPr>
+          <p:cNvPr id="15" name="TextBox 14"/>
+          <p:cNvSpPr txBox="1"/>
+          <p:nvPr/>
+        </p:nvSpPr>
+        <p:spPr>
+          <a:xfrm>
+            <a:off x="457200" y="1426464"/>
+            <a:ext cx="2651760" cy="566928"/>
+          </a:xfrm>
+          <a:prstGeom prst="rect">
+            <a:avLst/>
+          </a:prstGeom>
+          <a:noFill/>
+        </p:spPr>
+        <p:txBody>
+          <a:bodyPr wrap="square">
+            <a:spAutoFit/>
+          </a:bodyPr>
+          <a:lstStyle/>
+          <a:p>
+            <a:r>
+              <a:rPr sz="1400" b="1">
+                <a:solidFill>
+                  <a:srgbClr val="2E7D46"/>
+                </a:solidFill>
+                <a:latin typeface="微软雅黑"/>
+              </a:rPr>
+              <a:t>实测达成档位</a:t>
+            </a:r>
+          </a:p>
+          <a:p>
+            <a:r>
+              <a:rPr sz="1400" b="1">
+                <a:solidFill>
+                  <a:srgbClr val="2E7D46"/>
+                </a:solidFill>
+                <a:latin typeface="微软雅黑"/>
+              </a:rPr>
+              <a:t>优(A)</a:t>
+            </a:r>
+          </a:p>
+        </p:txBody>
+      </p:sp>
+      <p:sp>
+        <p:nvSpPr>
+          <p:cNvPr id="16" name="Rectangle 15"/>
+          <p:cNvSpPr/>
+          <p:nvPr/>
+        </p:nvSpPr>
+        <p:spPr>
+          <a:xfrm>
+            <a:off x="3200400" y="1426464"/>
+            <a:ext cx="1627632" cy="603504"/>
+          </a:xfrm>
+          <a:prstGeom prst="rect">
+            <a:avLst/>
+          </a:prstGeom>
+          <a:solidFill>
+            <a:srgbClr val="FFFFFF"/>
+          </a:solidFill>
+          <a:ln>
+            <a:solidFill>
+              <a:srgbClr val="D6DCE4"/>
+            </a:solidFill>
+          </a:ln>
+          <a:effectLst/>
+        </p:spPr>
+        <p:style>
+          <a:lnRef idx="1">
+            <a:schemeClr val="accent1"/>
+          </a:lnRef>
+          <a:fillRef idx="3">
+            <a:schemeClr val="accent1"/>
+          </a:fillRef>
+          <a:effectRef idx="2">
+            <a:schemeClr val="accent1"/>
+          </a:effectRef>
+          <a:fontRef idx="minor">
+            <a:schemeClr val="lt1"/>
+          </a:fontRef>
+        </p:style>
+        <p:txBody>
+          <a:bodyPr rtlCol="0" anchor="ctr" wrap="square"/>
+          <a:lstStyle/>
+          <a:p>
+            <a:pPr algn="ctr"/>
+          </a:p>
+        </p:txBody>
+      </p:sp>
+      <p:sp>
+        <p:nvSpPr>
+          <p:cNvPr id="17" name="TextBox 16"/>
+          <p:cNvSpPr txBox="1"/>
+          <p:nvPr/>
+        </p:nvSpPr>
+        <p:spPr>
+          <a:xfrm>
+            <a:off x="3246120" y="1463040"/>
+            <a:ext cx="1536192" cy="548640"/>
+          </a:xfrm>
+          <a:prstGeom prst="rect">
+            <a:avLst/>
+          </a:prstGeom>
+          <a:noFill/>
+        </p:spPr>
+        <p:txBody>
+          <a:bodyPr wrap="square">
+            <a:spAutoFit/>
+          </a:bodyPr>
+          <a:lstStyle/>
+          <a:p>
+            <a:r>
+              <a:rPr sz="900" b="0">
+                <a:solidFill>
+                  <a:srgbClr val="35506E"/>
+                </a:solidFill>
+                <a:latin typeface="微软雅黑"/>
+              </a:rPr>
+              <a:t>实测最优准确率 1.0000</a:t>
+            </a:r>
+          </a:p>
+        </p:txBody>
+      </p:sp>
+      <p:sp>
+        <p:nvSpPr>
+          <p:cNvPr id="18" name="Rectangle 17"/>
+          <p:cNvSpPr/>
+          <p:nvPr/>
+        </p:nvSpPr>
+        <p:spPr>
+          <a:xfrm>
+            <a:off x="4901184" y="1426464"/>
+            <a:ext cx="1627632" cy="603504"/>
+          </a:xfrm>
+          <a:prstGeom prst="rect">
+            <a:avLst/>
+          </a:prstGeom>
+          <a:solidFill>
+            <a:srgbClr val="FFFFFF"/>
+          </a:solidFill>
+          <a:ln>
+            <a:solidFill>
+              <a:srgbClr val="D6DCE4"/>
+            </a:solidFill>
+          </a:ln>
+          <a:effectLst/>
+        </p:spPr>
+        <p:style>
+          <a:lnRef idx="1">
+            <a:schemeClr val="accent1"/>
+          </a:lnRef>
+          <a:fillRef idx="3">
+            <a:schemeClr val="accent1"/>
+          </a:fillRef>
+          <a:effectRef idx="2">
+            <a:schemeClr val="accent1"/>
+          </a:effectRef>
+          <a:fontRef idx="minor">
+            <a:schemeClr val="lt1"/>
+          </a:fontRef>
+        </p:style>
+        <p:txBody>
+          <a:bodyPr rtlCol="0" anchor="ctr" wrap="square"/>
+          <a:lstStyle/>
+          <a:p>
+            <a:pPr algn="ctr"/>
+          </a:p>
+        </p:txBody>
+      </p:sp>
+      <p:sp>
+        <p:nvSpPr>
+          <p:cNvPr id="19" name="TextBox 18"/>
+          <p:cNvSpPr txBox="1"/>
+          <p:nvPr/>
+        </p:nvSpPr>
+        <p:spPr>
+          <a:xfrm>
+            <a:off x="4946904" y="1463040"/>
+            <a:ext cx="1536192" cy="548640"/>
+          </a:xfrm>
+          <a:prstGeom prst="rect">
+            <a:avLst/>
+          </a:prstGeom>
+          <a:noFill/>
+        </p:spPr>
+        <p:txBody>
+          <a:bodyPr wrap="square">
+            <a:spAutoFit/>
+          </a:bodyPr>
+          <a:lstStyle/>
+          <a:p>
+            <a:r>
+              <a:rPr sz="900" b="0">
+                <a:solidFill>
+                  <a:srgbClr val="35506E"/>
+                </a:solidFill>
+                <a:latin typeface="微软雅黑"/>
+              </a:rPr>
+              <a:t>规范率 97.39%</a:t>
+            </a:r>
+          </a:p>
+        </p:txBody>
+      </p:sp>
+      <p:sp>
+        <p:nvSpPr>
+          <p:cNvPr id="20" name="Rectangle 19"/>
+          <p:cNvSpPr/>
+          <p:nvPr/>
+        </p:nvSpPr>
+        <p:spPr>
+          <a:xfrm>
+            <a:off x="6601968" y="1426464"/>
+            <a:ext cx="1627632" cy="603504"/>
+          </a:xfrm>
+          <a:prstGeom prst="rect">
+            <a:avLst/>
+          </a:prstGeom>
+          <a:solidFill>
+            <a:srgbClr val="FFFFFF"/>
+          </a:solidFill>
+          <a:ln>
+            <a:solidFill>
+              <a:srgbClr val="D6DCE4"/>
+            </a:solidFill>
+          </a:ln>
+          <a:effectLst/>
+        </p:spPr>
+        <p:style>
+          <a:lnRef idx="1">
+            <a:schemeClr val="accent1"/>
+          </a:lnRef>
+          <a:fillRef idx="3">
+            <a:schemeClr val="accent1"/>
+          </a:fillRef>
+          <a:effectRef idx="2">
+            <a:schemeClr val="accent1"/>
+          </a:effectRef>
+          <a:fontRef idx="minor">
+            <a:schemeClr val="lt1"/>
+          </a:fontRef>
+        </p:style>
+        <p:txBody>
+          <a:bodyPr rtlCol="0" anchor="ctr" wrap="square"/>
+          <a:lstStyle/>
+          <a:p>
+            <a:pPr algn="ctr"/>
+          </a:p>
+        </p:txBody>
+      </p:sp>
+      <p:sp>
+        <p:nvSpPr>
+          <p:cNvPr id="21" name="TextBox 20"/>
+          <p:cNvSpPr txBox="1"/>
+          <p:nvPr/>
+        </p:nvSpPr>
+        <p:spPr>
+          <a:xfrm>
+            <a:off x="6647688" y="1463040"/>
+            <a:ext cx="1536192" cy="548640"/>
+          </a:xfrm>
+          <a:prstGeom prst="rect">
+            <a:avLst/>
+          </a:prstGeom>
+          <a:noFill/>
+        </p:spPr>
+        <p:txBody>
+          <a:bodyPr wrap="square">
+            <a:spAutoFit/>
+          </a:bodyPr>
+          <a:lstStyle/>
+          <a:p>
+            <a:r>
+              <a:rPr sz="900" b="0">
+                <a:solidFill>
+                  <a:srgbClr val="35506E"/>
+                </a:solidFill>
+                <a:latin typeface="微软雅黑"/>
+              </a:rPr>
+              <a:t>对照表实测行 4 条</a:t>
+            </a:r>
+          </a:p>
+        </p:txBody>
+      </p:sp>
+      <p:sp>
+        <p:nvSpPr>
+          <p:cNvPr id="22" name="Rectangle 21"/>
+          <p:cNvSpPr/>
+          <p:nvPr/>
+        </p:nvSpPr>
+        <p:spPr>
+          <a:xfrm>
+            <a:off x="8302752" y="1426464"/>
+            <a:ext cx="1627632" cy="603504"/>
+          </a:xfrm>
+          <a:prstGeom prst="rect">
+            <a:avLst/>
+          </a:prstGeom>
+          <a:solidFill>
+            <a:srgbClr val="FFFFFF"/>
+          </a:solidFill>
+          <a:ln>
+            <a:solidFill>
+              <a:srgbClr val="D6DCE4"/>
+            </a:solidFill>
+          </a:ln>
+          <a:effectLst/>
+        </p:spPr>
+        <p:style>
+          <a:lnRef idx="1">
+            <a:schemeClr val="accent1"/>
+          </a:lnRef>
+          <a:fillRef idx="3">
+            <a:schemeClr val="accent1"/>
+          </a:fillRef>
+          <a:effectRef idx="2">
+            <a:schemeClr val="accent1"/>
+          </a:effectRef>
+          <a:fontRef idx="minor">
+            <a:schemeClr val="lt1"/>
+          </a:fontRef>
+        </p:style>
+        <p:txBody>
+          <a:bodyPr rtlCol="0" anchor="ctr" wrap="square"/>
+          <a:lstStyle/>
+          <a:p>
+            <a:pPr algn="ctr"/>
+          </a:p>
+        </p:txBody>
+      </p:sp>
+      <p:sp>
+        <p:nvSpPr>
+          <p:cNvPr id="23" name="TextBox 22"/>
+          <p:cNvSpPr txBox="1"/>
+          <p:nvPr/>
+        </p:nvSpPr>
+        <p:spPr>
+          <a:xfrm>
+            <a:off x="8348472" y="1463040"/>
+            <a:ext cx="1536192" cy="548640"/>
+          </a:xfrm>
+          <a:prstGeom prst="rect">
+            <a:avLst/>
+          </a:prstGeom>
+          <a:noFill/>
+        </p:spPr>
+        <p:txBody>
+          <a:bodyPr wrap="square">
+            <a:spAutoFit/>
+          </a:bodyPr>
+          <a:lstStyle/>
+          <a:p>
+            <a:r>
+              <a:rPr sz="900" b="0">
+                <a:solidFill>
+                  <a:srgbClr val="35506E"/>
+                </a:solidFill>
+                <a:latin typeface="微软雅黑"/>
+              </a:rPr>
+              <a:t>增强增益 冻结 -0.0050/微调 +0.4850</a:t>
+            </a:r>
+          </a:p>
+        </p:txBody>
+      </p:sp>
+      <p:sp>
+        <p:nvSpPr>
+          <p:cNvPr id="24" name="Rectangle 23"/>
+          <p:cNvSpPr/>
+          <p:nvPr/>
+        </p:nvSpPr>
+        <p:spPr>
+          <a:xfrm>
+            <a:off x="10003536" y="1426464"/>
+            <a:ext cx="1627632" cy="603504"/>
+          </a:xfrm>
+          <a:prstGeom prst="rect">
+            <a:avLst/>
+          </a:prstGeom>
+          <a:solidFill>
+            <a:srgbClr val="FFFFFF"/>
+          </a:solidFill>
+          <a:ln>
+            <a:solidFill>
+              <a:srgbClr val="D6DCE4"/>
+            </a:solidFill>
+          </a:ln>
+          <a:effectLst/>
+        </p:spPr>
+        <p:style>
+          <a:lnRef idx="1">
+            <a:schemeClr val="accent1"/>
+          </a:lnRef>
+          <a:fillRef idx="3">
+            <a:schemeClr val="accent1"/>
+          </a:fillRef>
+          <a:effectRef idx="2">
+            <a:schemeClr val="accent1"/>
+          </a:effectRef>
+          <a:fontRef idx="minor">
+            <a:schemeClr val="lt1"/>
+          </a:fontRef>
+        </p:style>
+        <p:txBody>
+          <a:bodyPr rtlCol="0" anchor="ctr" wrap="square"/>
+          <a:lstStyle/>
+          <a:p>
+            <a:pPr algn="ctr"/>
+          </a:p>
+        </p:txBody>
+      </p:sp>
+      <p:sp>
+        <p:nvSpPr>
+          <p:cNvPr id="25" name="TextBox 24"/>
+          <p:cNvSpPr txBox="1"/>
+          <p:nvPr/>
+        </p:nvSpPr>
+        <p:spPr>
+          <a:xfrm>
+            <a:off x="10049256" y="1463040"/>
+            <a:ext cx="1536192" cy="548640"/>
+          </a:xfrm>
+          <a:prstGeom prst="rect">
+            <a:avLst/>
+          </a:prstGeom>
+          <a:noFill/>
+        </p:spPr>
+        <p:txBody>
+          <a:bodyPr wrap="square">
+            <a:spAutoFit/>
+          </a:bodyPr>
+          <a:lstStyle/>
+          <a:p>
+            <a:r>
+              <a:rPr sz="900" b="0">
+                <a:solidFill>
+                  <a:srgbClr val="35506E"/>
+                </a:solidFill>
+                <a:latin typeface="微软雅黑"/>
+              </a:rPr>
+              <a:t>决策记录 1 条</a:t>
+            </a:r>
+          </a:p>
+        </p:txBody>
+      </p:sp>
+      <p:graphicFrame>
+        <p:nvGraphicFramePr>
+          <p:cNvPr id="26" name="Table 25"/>
+          <p:cNvGraphicFramePr>
+            <a:graphicFrameLocks noGrp="1"/>
+          </p:cNvGraphicFramePr>
+          <p:nvPr/>
+        </p:nvGraphicFramePr>
+        <p:xfrm>
+          <a:off x="457200" y="2212848"/>
+          <a:ext cx="11274552" cy="2834640"/>
+        </p:xfrm>
+        <a:graphic>
+          <a:graphicData uri="http://schemas.openxmlformats.org/drawingml/2006/table">
+            <a:tbl>
+              <a:tblPr firstRow="1" bandRow="1">
+                <a:tableStyleId>{5C22544A-7EE6-4342-B048-85BDC9FD1C3A}</a:tableStyleId>
+              </a:tblPr>
+              <a:tblGrid>
+                <a:gridCol w="1188720"/>
+                <a:gridCol w="5120640"/>
+                <a:gridCol w="3886200"/>
+                <a:gridCol w="1078992"/>
+              </a:tblGrid>
+              <a:tr h="566928">
+                <a:tc>
+                  <a:txBody>
+                    <a:bodyPr/>
+                    <a:lstStyle/>
+                    <a:p>
+                      <a:r>
+                        <a:rPr sz="1050" b="1">
+                          <a:solidFill>
+                            <a:srgbClr val="FFFFFF"/>
+                          </a:solidFill>
+                          <a:latin typeface="微软雅黑"/>
+                        </a:rPr>
+                        <a:t>档位</a:t>
+                      </a:r>
+                    </a:p>
+                  </a:txBody>
+                  <a:tcPr>
+                    <a:solidFill>
+                      <a:srgbClr val="010328"/>
+                    </a:solidFill>
+                  </a:tcPr>
+                </a:tc>
+                <a:tc>
+                  <a:txBody>
+                    <a:bodyPr/>
+                    <a:lstStyle/>
+                    <a:p>
+                      <a:r>
+                        <a:rPr sz="1050" b="1">
+                          <a:solidFill>
+                            <a:srgbClr val="FFFFFF"/>
+                          </a:solidFill>
+                          <a:latin typeface="微软雅黑"/>
+                        </a:rPr>
+                        <a:t>工单验收标准（原文）</a:t>
+                      </a:r>
+                    </a:p>
+                  </a:txBody>
+                  <a:tcPr>
+                    <a:solidFill>
+                      <a:srgbClr val="010328"/>
+                    </a:solidFill>
+                  </a:tcPr>
+                </a:tc>
+                <a:tc>
+                  <a:txBody>
+                    <a:bodyPr/>
+                    <a:lstStyle/>
+                    <a:p>
+                      <a:r>
+                        <a:rPr sz="1050" b="1">
+                          <a:solidFill>
+                            <a:srgbClr val="FFFFFF"/>
+                          </a:solidFill>
+                          <a:latin typeface="微软雅黑"/>
+                        </a:rPr>
+                        <a:t>本次实测判定</a:t>
+                      </a:r>
+                    </a:p>
+                  </a:txBody>
+                  <a:tcPr>
+                    <a:solidFill>
+                      <a:srgbClr val="010328"/>
+                    </a:solidFill>
+                  </a:tcPr>
+                </a:tc>
+                <a:tc>
+                  <a:txBody>
+                    <a:bodyPr/>
+                    <a:lstStyle/>
+                    <a:p>
+                      <a:r>
+                        <a:rPr sz="1050" b="1">
+                          <a:solidFill>
+                            <a:srgbClr val="FFFFFF"/>
+                          </a:solidFill>
+                          <a:latin typeface="微软雅黑"/>
+                        </a:rPr>
+                        <a:t>判定</a:t>
+                      </a:r>
+                    </a:p>
+                  </a:txBody>
+                  <a:tcPr>
+                    <a:solidFill>
+                      <a:srgbClr val="010328"/>
+                    </a:solidFill>
+                  </a:tcPr>
+                </a:tc>
+              </a:tr>
+              <a:tr h="566928">
+                <a:tc>
+                  <a:txBody>
+                    <a:bodyPr/>
+                    <a:lstStyle/>
+                    <a:p>
+                      <a:r>
+                        <a:rPr sz="1000" b="1">
+                          <a:solidFill>
+                            <a:srgbClr val="2B2F36"/>
+                          </a:solidFill>
+                          <a:latin typeface="微软雅黑"/>
+                        </a:rPr>
+                        <a:t>及格(D)</a:t>
+                      </a:r>
+                    </a:p>
+                  </a:txBody>
+                  <a:tcPr>
+                    <a:solidFill>
+                      <a:srgbClr val="FFFFFF"/>
+                    </a:solidFill>
+                  </a:tcPr>
+                </a:tc>
+                <a:tc>
+                  <a:txBody>
+                    <a:bodyPr/>
+                    <a:lstStyle/>
+                    <a:p>
+                      <a:r>
+                        <a:rPr sz="950" b="0">
+                          <a:solidFill>
+                            <a:srgbClr val="2B2F36"/>
+                          </a:solidFill>
+                          <a:latin typeface="微软雅黑"/>
+                        </a:rPr>
+                        <a:t>准确率门槛≥0.7（实测 1.0000）</a:t>
+                      </a:r>
+                    </a:p>
+                  </a:txBody>
+                  <a:tcPr>
+                    <a:solidFill>
+                      <a:srgbClr val="FFFFFF"/>
+                    </a:solidFill>
+                  </a:tcPr>
+                </a:tc>
+                <a:tc>
+                  <a:txBody>
+                    <a:bodyPr/>
+                    <a:lstStyle/>
+                    <a:p>
+                      <a:r>
+                        <a:rPr sz="950" b="0">
+                          <a:solidFill>
+                            <a:srgbClr val="2B2F36"/>
+                          </a:solidFill>
+                          <a:latin typeface="微软雅黑"/>
+                        </a:rPr>
+                        <a:t>规范率门槛≥70% [达标] ｜ 功能OK</a:t>
+                      </a:r>
+                    </a:p>
+                  </a:txBody>
+                  <a:tcPr>
+                    <a:solidFill>
+                      <a:srgbClr val="FFFFFF"/>
+                    </a:solidFill>
+                  </a:tcPr>
+                </a:tc>
+                <a:tc>
+                  <a:txBody>
+                    <a:bodyPr/>
+                    <a:lstStyle/>
+                    <a:p>
+                      <a:r>
+                        <a:rPr sz="1000" b="1">
+                          <a:solidFill>
+                            <a:srgbClr val="2E7D46"/>
+                          </a:solidFill>
+                          <a:latin typeface="微软雅黑"/>
+                        </a:rPr>
+                        <a:t>✓ 达标</a:t>
+                      </a:r>
+                    </a:p>
+                  </a:txBody>
+                  <a:tcPr>
+                    <a:solidFill>
+                      <a:srgbClr val="FFFFFF"/>
+                    </a:solidFill>
+                  </a:tcPr>
+                </a:tc>
+              </a:tr>
+              <a:tr h="566928">
+                <a:tc>
+                  <a:txBody>
+                    <a:bodyPr/>
+                    <a:lstStyle/>
+                    <a:p>
+                      <a:r>
+                        <a:rPr sz="1000" b="1">
+                          <a:solidFill>
+                            <a:srgbClr val="2B2F36"/>
+                          </a:solidFill>
+                          <a:latin typeface="微软雅黑"/>
+                        </a:rPr>
+                        <a:t>良好(C)</a:t>
+                      </a:r>
+                    </a:p>
+                  </a:txBody>
+                  <a:tcPr>
+                    <a:solidFill>
+                      <a:srgbClr val="F7F9FB"/>
+                    </a:solidFill>
+                  </a:tcPr>
+                </a:tc>
+                <a:tc>
+                  <a:txBody>
+                    <a:bodyPr/>
+                    <a:lstStyle/>
+                    <a:p>
+                      <a:r>
+                        <a:rPr sz="950" b="0">
+                          <a:solidFill>
+                            <a:srgbClr val="2B2F36"/>
+                          </a:solidFill>
+                          <a:latin typeface="微软雅黑"/>
+                        </a:rPr>
+                        <a:t>准确率≥0.75 且对照行≥2（实测 1.0000 / 4 行）</a:t>
+                      </a:r>
+                    </a:p>
+                  </a:txBody>
+                  <a:tcPr>
+                    <a:solidFill>
+                      <a:srgbClr val="F7F9FB"/>
+                    </a:solidFill>
+                  </a:tcPr>
+                </a:tc>
+                <a:tc>
+                  <a:txBody>
+                    <a:bodyPr/>
+                    <a:lstStyle/>
+                    <a:p>
+                      <a:r>
+                        <a:rPr sz="950" b="0">
+                          <a:solidFill>
+                            <a:srgbClr val="2B2F36"/>
+                          </a:solidFill>
+                          <a:latin typeface="微软雅黑"/>
+                        </a:rPr>
+                        <a:t>规范率门槛≥70% [达标] ｜ 功能OK</a:t>
+                      </a:r>
+                    </a:p>
+                  </a:txBody>
+                  <a:tcPr>
+                    <a:solidFill>
+                      <a:srgbClr val="F7F9FB"/>
+                    </a:solidFill>
+                  </a:tcPr>
+                </a:tc>
+                <a:tc>
+                  <a:txBody>
+                    <a:bodyPr/>
+                    <a:lstStyle/>
+                    <a:p>
+                      <a:r>
+                        <a:rPr sz="1000" b="1">
+                          <a:solidFill>
+                            <a:srgbClr val="2E7D46"/>
+                          </a:solidFill>
+                          <a:latin typeface="微软雅黑"/>
+                        </a:rPr>
+                        <a:t>✓ 达标</a:t>
+                      </a:r>
+                    </a:p>
+                  </a:txBody>
+                  <a:tcPr>
+                    <a:solidFill>
+                      <a:srgbClr val="F7F9FB"/>
+                    </a:solidFill>
+                  </a:tcPr>
+                </a:tc>
+              </a:tr>
+              <a:tr h="566928">
+                <a:tc>
+                  <a:txBody>
+                    <a:bodyPr/>
+                    <a:lstStyle/>
+                    <a:p>
+                      <a:r>
+                        <a:rPr sz="1000" b="1">
+                          <a:solidFill>
+                            <a:srgbClr val="2B2F36"/>
+                          </a:solidFill>
+                          <a:latin typeface="微软雅黑"/>
+                        </a:rPr>
+                        <a:t>优秀(B)</a:t>
+                      </a:r>
+                    </a:p>
+                  </a:txBody>
+                  <a:tcPr>
+                    <a:solidFill>
+                      <a:srgbClr val="FFFFFF"/>
+                    </a:solidFill>
+                  </a:tcPr>
+                </a:tc>
+                <a:tc>
+                  <a:txBody>
+                    <a:bodyPr/>
+                    <a:lstStyle/>
+                    <a:p>
+                      <a:r>
+                        <a:rPr sz="950" b="0">
+                          <a:solidFill>
+                            <a:srgbClr val="2B2F36"/>
+                          </a:solidFill>
+                          <a:latin typeface="微软雅黑"/>
+                        </a:rPr>
+                        <a:t>准确率≥0.8 或增强有效（增益见上行）且决策记录≥1（实测 1）</a:t>
+                      </a:r>
+                    </a:p>
+                  </a:txBody>
+                  <a:tcPr>
+                    <a:solidFill>
+                      <a:srgbClr val="FFFFFF"/>
+                    </a:solidFill>
+                  </a:tcPr>
+                </a:tc>
+                <a:tc>
+                  <a:txBody>
+                    <a:bodyPr/>
+                    <a:lstStyle/>
+                    <a:p>
+                      <a:r>
+                        <a:rPr sz="950" b="0">
+                          <a:solidFill>
+                            <a:srgbClr val="2B2F36"/>
+                          </a:solidFill>
+                          <a:latin typeface="微软雅黑"/>
+                        </a:rPr>
+                        <a:t>规范率门槛≥70% [达标] ｜ 功能OK</a:t>
+                      </a:r>
+                    </a:p>
+                  </a:txBody>
+                  <a:tcPr>
+                    <a:solidFill>
+                      <a:srgbClr val="FFFFFF"/>
+                    </a:solidFill>
+                  </a:tcPr>
+                </a:tc>
+                <a:tc>
+                  <a:txBody>
+                    <a:bodyPr/>
+                    <a:lstStyle/>
+                    <a:p>
+                      <a:r>
+                        <a:rPr sz="1000" b="1">
+                          <a:solidFill>
+                            <a:srgbClr val="2E7D46"/>
+                          </a:solidFill>
+                          <a:latin typeface="微软雅黑"/>
+                        </a:rPr>
+                        <a:t>✓ 达标</a:t>
+                      </a:r>
+                    </a:p>
+                  </a:txBody>
+                  <a:tcPr>
+                    <a:solidFill>
+                      <a:srgbClr val="FFFFFF"/>
+                    </a:solidFill>
+                  </a:tcPr>
+                </a:tc>
+              </a:tr>
+              <a:tr h="566928">
+                <a:tc>
+                  <a:txBody>
+                    <a:bodyPr/>
+                    <a:lstStyle/>
+                    <a:p>
+                      <a:r>
+                        <a:rPr sz="1000" b="1">
+                          <a:solidFill>
+                            <a:srgbClr val="2B2F36"/>
+                          </a:solidFill>
+                          <a:latin typeface="微软雅黑"/>
+                        </a:rPr>
+                        <a:t>优(A)</a:t>
+                      </a:r>
+                    </a:p>
+                  </a:txBody>
+                  <a:tcPr>
+                    <a:solidFill>
+                      <a:srgbClr val="F7F9FB"/>
+                    </a:solidFill>
+                  </a:tcPr>
+                </a:tc>
+                <a:tc>
+                  <a:txBody>
+                    <a:bodyPr/>
+                    <a:lstStyle/>
+                    <a:p>
+                      <a:r>
+                        <a:rPr sz="950" b="0">
+                          <a:solidFill>
+                            <a:srgbClr val="2B2F36"/>
+                          </a:solidFill>
+                          <a:latin typeface="微软雅黑"/>
+                        </a:rPr>
+                        <a:t>准确率≥0.85 且有训练曲线（实测 1.0000 / 1 张）</a:t>
+                      </a:r>
+                    </a:p>
+                  </a:txBody>
+                  <a:tcPr>
+                    <a:solidFill>
+                      <a:srgbClr val="F7F9FB"/>
+                    </a:solidFill>
+                  </a:tcPr>
+                </a:tc>
+                <a:tc>
+                  <a:txBody>
+                    <a:bodyPr/>
+                    <a:lstStyle/>
+                    <a:p>
+                      <a:r>
+                        <a:rPr sz="950" b="0">
+                          <a:solidFill>
+                            <a:srgbClr val="2B2F36"/>
+                          </a:solidFill>
+                          <a:latin typeface="微软雅黑"/>
+                        </a:rPr>
+                        <a:t>规范率门槛≥70% [达标] ｜ 功能OK</a:t>
+                      </a:r>
+                    </a:p>
+                  </a:txBody>
+                  <a:tcPr>
+                    <a:solidFill>
+                      <a:srgbClr val="F7F9FB"/>
+                    </a:solidFill>
+                  </a:tcPr>
+                </a:tc>
+                <a:tc>
+                  <a:txBody>
+                    <a:bodyPr/>
+                    <a:lstStyle/>
+                    <a:p>
+                      <a:r>
+                        <a:rPr sz="1000" b="1">
+                          <a:solidFill>
+                            <a:srgbClr val="2E7D46"/>
+                          </a:solidFill>
+                          <a:latin typeface="微软雅黑"/>
+                        </a:rPr>
+                        <a:t>✓ 达标</a:t>
+                      </a:r>
+                    </a:p>
+                  </a:txBody>
+                  <a:tcPr>
+                    <a:solidFill>
+                      <a:srgbClr val="F7F9FB"/>
+                    </a:solidFill>
+                  </a:tcPr>
+                </a:tc>
+              </a:tr>
+            </a:tbl>
+          </a:graphicData>
+        </a:graphic>
+      </p:graphicFrame>
+      <p:sp>
+        <p:nvSpPr>
+          <p:cNvPr id="27" name="Rectangle 26"/>
+          <p:cNvSpPr/>
+          <p:nvPr/>
+        </p:nvSpPr>
+        <p:spPr>
+          <a:xfrm>
+            <a:off x="457200" y="5138928"/>
+            <a:ext cx="11274552" cy="1261872"/>
+          </a:xfrm>
+          <a:prstGeom prst="rect">
+            <a:avLst/>
+          </a:prstGeom>
+          <a:solidFill>
+            <a:srgbClr val="FFF7E8"/>
+          </a:solidFill>
+          <a:ln>
+            <a:solidFill>
+              <a:srgbClr val="E8C88A"/>
+            </a:solidFill>
+          </a:ln>
+          <a:effectLst/>
+        </p:spPr>
+        <p:style>
+          <a:lnRef idx="1">
+            <a:schemeClr val="accent1"/>
+          </a:lnRef>
+          <a:fillRef idx="3">
+            <a:schemeClr val="accent1"/>
+          </a:fillRef>
+          <a:effectRef idx="2">
+            <a:schemeClr val="accent1"/>
+          </a:effectRef>
+          <a:fontRef idx="minor">
+            <a:schemeClr val="lt1"/>
+          </a:fontRef>
+        </p:style>
+        <p:txBody>
+          <a:bodyPr rtlCol="0" anchor="ctr" wrap="square"/>
+          <a:lstStyle/>
+          <a:p>
+            <a:pPr algn="ctr"/>
+          </a:p>
+        </p:txBody>
+      </p:sp>
+      <p:sp>
+        <p:nvSpPr>
+          <p:cNvPr id="28" name="TextBox 27"/>
+          <p:cNvSpPr txBox="1"/>
+          <p:nvPr/>
+        </p:nvSpPr>
+        <p:spPr>
+          <a:xfrm>
+            <a:off x="621792" y="5212080"/>
+            <a:ext cx="10927080" cy="1133856"/>
+          </a:xfrm>
+          <a:prstGeom prst="rect">
+            <a:avLst/>
+          </a:prstGeom>
+          <a:noFill/>
+        </p:spPr>
+        <p:txBody>
+          <a:bodyPr wrap="square">
+            <a:spAutoFit/>
+          </a:bodyPr>
+          <a:lstStyle/>
+          <a:p>
+            <a:r>
+              <a:rPr sz="950" b="0">
+                <a:solidFill>
+                  <a:srgbClr val="6B4E16"/>
+                </a:solidFill>
+                <a:latin typeface="微软雅黑"/>
+              </a:rPr>
+              <a:t>人工答辩项 3 条（代码不代判，答辩现场确认）：决策结论与理由的口头陈述（工单：答辩必答）；企业元验收栏签认（功能可用/参数留痕/数据可信，值班师傅签字）；底座口径是否可接受（真ResNet=本地缓存离线载入 / 兜底=本地CNN，实测证据见报告底座口径段）</a:t>
+            </a:r>
+          </a:p>
+          <a:p>
+            <a:r>
+              <a:rPr sz="950" b="0">
+                <a:solidFill>
+                  <a:srgbClr val="6B4E16"/>
+                </a:solidFill>
+                <a:latin typeface="微软雅黑"/>
+              </a:rPr>
+              <a:t>档位是算出来的：判定值由 run.py 本次真跑产生；工单未给数字的门槛在报告里标注为「兜底口径·非工单数字」。</a:t>
+            </a:r>
+          </a:p>
+          <a:p>
+            <a:r>
+              <a:rPr sz="950" b="0">
+                <a:solidFill>
+                  <a:srgbClr val="6B4E16"/>
+                </a:solidFill>
+                <a:latin typeface="微软雅黑"/>
+              </a:rPr>
+              <a:t>实测值共 6 项，本页只列前 5 项，其余见下页 report.txt 截图。</a:t>
+            </a:r>
+          </a:p>
+        </p:txBody>
+      </p:sp>
+    </p:spTree>
+  </p:cSld>
+  <p:clrMapOvr>
+    <a:masterClrMapping/>
+  </p:clrMapOvr>
+</p:sld>
+</file>
+
+<file path=ppt/slides/slide65.xml><?xml version="1.0" encoding="utf-8"?>
+<p:sld xmlns:a="http://schemas.openxmlformats.org/drawingml/2006/main" xmlns:p="http://schemas.openxmlformats.org/presentationml/2006/main" xmlns:r="http://schemas.openxmlformats.org/officeDocument/2006/relationships">
+  <p:cSld>
+    <p:spTree>
+      <p:nvGrpSpPr>
+        <p:cNvPr id="1" name=""/>
+        <p:cNvGrpSpPr/>
+        <p:nvPr/>
+      </p:nvGrpSpPr>
+      <p:grpSpPr/>
+      <p:sp>
+        <p:nvSpPr>
+          <p:cNvPr id="2" name="Rectangle 1"/>
+          <p:cNvSpPr/>
+          <p:nvPr/>
+        </p:nvSpPr>
+        <p:spPr>
+          <a:xfrm>
+            <a:off x="0" y="0"/>
+            <a:ext cx="12192000" cy="1150000"/>
+          </a:xfrm>
+          <a:prstGeom prst="rect">
+            <a:avLst/>
+          </a:prstGeom>
+          <a:solidFill>
+            <a:srgbClr val="010328"/>
+          </a:solidFill>
+          <a:ln>
+            <a:noFill/>
+          </a:ln>
+          <a:effectLst/>
+        </p:spPr>
+        <p:style>
+          <a:lnRef idx="1">
+            <a:schemeClr val="accent1"/>
+          </a:lnRef>
+          <a:fillRef idx="3">
+            <a:schemeClr val="accent1"/>
+          </a:fillRef>
+          <a:effectRef idx="2">
+            <a:schemeClr val="accent1"/>
+          </a:effectRef>
+          <a:fontRef idx="minor">
+            <a:schemeClr val="lt1"/>
+          </a:fontRef>
+        </p:style>
+        <p:txBody>
+          <a:bodyPr rtlCol="0" anchor="ctr"/>
+          <a:lstStyle/>
+          <a:p>
+            <a:pPr algn="ctr"/>
+          </a:p>
+        </p:txBody>
+      </p:sp>
+      <p:sp>
+        <p:nvSpPr>
+          <p:cNvPr id="3" name="Rectangle 2"/>
+          <p:cNvSpPr/>
+          <p:nvPr/>
+        </p:nvSpPr>
+        <p:spPr>
+          <a:xfrm>
+            <a:off x="0" y="1150000"/>
+            <a:ext cx="2600000" cy="70000"/>
+          </a:xfrm>
+          <a:prstGeom prst="rect">
+            <a:avLst/>
+          </a:prstGeom>
+          <a:solidFill>
+            <a:srgbClr val="F5670F"/>
+          </a:solidFill>
+          <a:ln>
+            <a:noFill/>
+          </a:ln>
+          <a:effectLst/>
+        </p:spPr>
+        <p:style>
+          <a:lnRef idx="1">
+            <a:schemeClr val="accent1"/>
+          </a:lnRef>
+          <a:fillRef idx="3">
+            <a:schemeClr val="accent1"/>
+          </a:fillRef>
+          <a:effectRef idx="2">
+            <a:schemeClr val="accent1"/>
+          </a:effectRef>
+          <a:fontRef idx="minor">
+            <a:schemeClr val="lt1"/>
+          </a:fontRef>
+        </p:style>
+        <p:txBody>
+          <a:bodyPr rtlCol="0" anchor="ctr"/>
+          <a:lstStyle/>
+          <a:p>
+            <a:pPr algn="ctr"/>
+          </a:p>
+        </p:txBody>
+      </p:sp>
+      <p:sp>
+        <p:nvSpPr>
+          <p:cNvPr id="4" name="TextBox 3"/>
+          <p:cNvSpPr txBox="1"/>
+          <p:nvPr/>
+        </p:nvSpPr>
+        <p:spPr>
+          <a:xfrm>
+            <a:off x="700000" y="300000"/>
+            <a:ext cx="10792000" cy="700000"/>
+          </a:xfrm>
+          <a:prstGeom prst="rect">
+            <a:avLst/>
+          </a:prstGeom>
+          <a:noFill/>
+        </p:spPr>
+        <p:txBody>
+          <a:bodyPr wrap="square" anchor="t">
+            <a:spAutoFit/>
+          </a:bodyPr>
+          <a:lstStyle/>
+          <a:p>
+            <a:pPr algn="l">
+              <a:lnSpc>
+                <a:spcPct val="110000"/>
+              </a:lnSpc>
+              <a:spcAft>
+                <a:spcPts val="600"/>
+              </a:spcAft>
+            </a:pPr>
+            <a:r>
+              <a:rPr sz="2400" b="1">
+                <a:solidFill>
+                  <a:srgbClr val="FFFFFF"/>
+                </a:solidFill>
+                <a:latin typeface="微软雅黑"/>
+              </a:rPr>
+              <a:t>实跑截图证据 · m31_transfer</a:t>
+            </a:r>
+          </a:p>
+        </p:txBody>
+      </p:sp>
+      <p:sp>
+        <p:nvSpPr>
+          <p:cNvPr id="11" name="Rectangle 10"/>
+          <p:cNvSpPr/>
+          <p:nvPr/>
+        </p:nvSpPr>
+        <p:spPr>
+          <a:xfrm>
+            <a:off x="500000" y="6500000"/>
+            <a:ext cx="11100000" cy="20000"/>
+          </a:xfrm>
+          <a:prstGeom prst="rect">
+            <a:avLst/>
+          </a:prstGeom>
+          <a:solidFill>
+            <a:srgbClr val="C9D4EE"/>
+          </a:solidFill>
+          <a:ln>
+            <a:noFill/>
+          </a:ln>
+          <a:effectLst/>
+        </p:spPr>
+        <p:style>
+          <a:lnRef idx="1">
+            <a:schemeClr val="accent1"/>
+          </a:lnRef>
+          <a:fillRef idx="3">
+            <a:schemeClr val="accent1"/>
+          </a:fillRef>
+          <a:effectRef idx="2">
+            <a:schemeClr val="accent1"/>
+          </a:effectRef>
+          <a:fontRef idx="minor">
+            <a:schemeClr val="lt1"/>
+          </a:fontRef>
+        </p:style>
+        <p:txBody>
+          <a:bodyPr rtlCol="0" anchor="ctr"/>
+          <a:lstStyle/>
+          <a:p>
+            <a:pPr algn="ctr"/>
+          </a:p>
+        </p:txBody>
+      </p:sp>
+      <p:sp>
+        <p:nvSpPr>
+          <p:cNvPr id="12" name="TextBox 11"/>
+          <p:cNvSpPr txBox="1"/>
+          <p:nvPr/>
+        </p:nvSpPr>
+        <p:spPr>
+          <a:xfrm>
+            <a:off x="500000" y="6540000"/>
+            <a:ext cx="7000000" cy="300000"/>
+          </a:xfrm>
+          <a:prstGeom prst="rect">
+            <a:avLst/>
+          </a:prstGeom>
+          <a:noFill/>
+        </p:spPr>
+        <p:txBody>
+          <a:bodyPr wrap="square" anchor="t">
+            <a:spAutoFit/>
+          </a:bodyPr>
+          <a:lstStyle/>
+          <a:p>
+            <a:pPr algn="l">
+              <a:lnSpc>
+                <a:spcPct val="110000"/>
+              </a:lnSpc>
+              <a:spcAft>
+                <a:spcPts val="600"/>
+              </a:spcAft>
+            </a:pPr>
+            <a:r>
+              <a:rPr sz="1000" b="0">
+                <a:solidFill>
+                  <a:srgbClr val="8A97B5"/>
+                </a:solidFill>
+                <a:latin typeface="微软雅黑"/>
+              </a:rPr>
+              <a:t>两江智造集团 · AI应用基础48课时版</a:t>
+            </a:r>
+          </a:p>
+        </p:txBody>
+      </p:sp>
+      <p:sp>
+        <p:nvSpPr>
+          <p:cNvPr id="13" name="TextBox 12"/>
+          <p:cNvSpPr txBox="1"/>
+          <p:nvPr/>
+        </p:nvSpPr>
+        <p:spPr>
+          <a:xfrm>
+            <a:off x="10600000" y="6540000"/>
+            <a:ext cx="1000000" cy="300000"/>
+          </a:xfrm>
+          <a:prstGeom prst="rect">
+            <a:avLst/>
+          </a:prstGeom>
+          <a:noFill/>
+        </p:spPr>
+        <p:txBody>
+          <a:bodyPr wrap="square" anchor="t">
+            <a:spAutoFit/>
+          </a:bodyPr>
+          <a:lstStyle/>
+          <a:p>
+            <a:pPr algn="r">
+              <a:lnSpc>
+                <a:spcPct val="110000"/>
+              </a:lnSpc>
+              <a:spcAft>
+                <a:spcPts val="600"/>
+              </a:spcAft>
+            </a:pPr>
+            <a:r>
+              <a:rPr sz="1000" b="0">
+                <a:solidFill>
+                  <a:srgbClr val="8A97B5"/>
+                </a:solidFill>
+                <a:latin typeface="微软雅黑"/>
+              </a:rPr>
+              <a:t>39 / 66</a:t>
+            </a:r>
+          </a:p>
+        </p:txBody>
+      </p:sp>
+      <p:sp>
+        <p:nvSpPr>
+          <p:cNvPr id="14" name="Rectangle 13"/>
+          <p:cNvSpPr/>
+          <p:nvPr/>
+        </p:nvSpPr>
+        <p:spPr>
+          <a:xfrm>
+            <a:off x="457200" y="1481328"/>
+            <a:ext cx="5486400" cy="2304288"/>
+          </a:xfrm>
+          <a:prstGeom prst="rect">
+            <a:avLst/>
+          </a:prstGeom>
+          <a:solidFill>
+            <a:srgbClr val="FFFFFF"/>
+          </a:solidFill>
+          <a:ln>
+            <a:solidFill>
+              <a:srgbClr val="D6DCE4"/>
+            </a:solidFill>
+          </a:ln>
+          <a:effectLst/>
+        </p:spPr>
+        <p:style>
+          <a:lnRef idx="1">
+            <a:schemeClr val="accent1"/>
+          </a:lnRef>
+          <a:fillRef idx="3">
+            <a:schemeClr val="accent1"/>
+          </a:fillRef>
+          <a:effectRef idx="2">
+            <a:schemeClr val="accent1"/>
+          </a:effectRef>
+          <a:fontRef idx="minor">
+            <a:schemeClr val="lt1"/>
+          </a:fontRef>
+        </p:style>
+        <p:txBody>
+          <a:bodyPr rtlCol="0" anchor="ctr" wrap="square"/>
+          <a:lstStyle/>
+          <a:p>
+            <a:pPr algn="ctr"/>
+          </a:p>
+        </p:txBody>
+      </p:sp>
+      <p:sp>
+        <p:nvSpPr>
+          <p:cNvPr id="15" name="TextBox 14"/>
+          <p:cNvSpPr txBox="1"/>
+          <p:nvPr/>
+        </p:nvSpPr>
+        <p:spPr>
+          <a:xfrm>
+            <a:off x="530352" y="1517904"/>
+            <a:ext cx="5340096" cy="237744"/>
+          </a:xfrm>
+          <a:prstGeom prst="rect">
+            <a:avLst/>
+          </a:prstGeom>
+          <a:noFill/>
+        </p:spPr>
+        <p:txBody>
+          <a:bodyPr wrap="square">
+            <a:spAutoFit/>
+          </a:bodyPr>
+          <a:lstStyle/>
+          <a:p>
+            <a:r>
+              <a:rPr sz="950" b="1">
+                <a:solidFill>
+                  <a:srgbClr val="010328"/>
+                </a:solidFill>
+                <a:latin typeface="微软雅黑"/>
+              </a:rPr>
+              <a:t>① run.py 实跑终端输出（逐字捕获）</a:t>
+            </a:r>
+          </a:p>
+        </p:txBody>
+      </p:sp>
+      <p:pic>
+        <p:nvPicPr>
+          <p:cNvPr id="16" name="Picture 15" descr="shot_run.png"/>
+          <p:cNvPicPr>
+            <a:picLocks noChangeAspect="1"/>
+          </p:cNvPicPr>
+          <p:nvPr/>
+        </p:nvPicPr>
+        <p:blipFill>
+          <a:blip r:embed="rId2"/>
+          <a:stretch>
+            <a:fillRect/>
+          </a:stretch>
+        </p:blipFill>
+        <p:spPr>
+          <a:xfrm>
+            <a:off x="964038" y="1773936"/>
+            <a:ext cx="4472722" cy="1956816"/>
+          </a:xfrm>
+          <a:prstGeom prst="rect">
+            <a:avLst/>
+          </a:prstGeom>
+        </p:spPr>
+      </p:pic>
+      <p:sp>
+        <p:nvSpPr>
+          <p:cNvPr id="17" name="Rectangle 16"/>
+          <p:cNvSpPr/>
+          <p:nvPr/>
+        </p:nvSpPr>
+        <p:spPr>
+          <a:xfrm>
+            <a:off x="6327648" y="1481328"/>
+            <a:ext cx="5486400" cy="2304288"/>
+          </a:xfrm>
+          <a:prstGeom prst="rect">
+            <a:avLst/>
+          </a:prstGeom>
+          <a:solidFill>
+            <a:srgbClr val="FFFFFF"/>
+          </a:solidFill>
+          <a:ln>
+            <a:solidFill>
+              <a:srgbClr val="D6DCE4"/>
+            </a:solidFill>
+          </a:ln>
+          <a:effectLst/>
+        </p:spPr>
+        <p:style>
+          <a:lnRef idx="1">
+            <a:schemeClr val="accent1"/>
+          </a:lnRef>
+          <a:fillRef idx="3">
+            <a:schemeClr val="accent1"/>
+          </a:fillRef>
+          <a:effectRef idx="2">
+            <a:schemeClr val="accent1"/>
+          </a:effectRef>
+          <a:fontRef idx="minor">
+            <a:schemeClr val="lt1"/>
+          </a:fontRef>
+        </p:style>
+        <p:txBody>
+          <a:bodyPr rtlCol="0" anchor="ctr" wrap="square"/>
+          <a:lstStyle/>
+          <a:p>
+            <a:pPr algn="ctr"/>
+          </a:p>
+        </p:txBody>
+      </p:sp>
+      <p:sp>
+        <p:nvSpPr>
+          <p:cNvPr id="18" name="TextBox 17"/>
+          <p:cNvSpPr txBox="1"/>
+          <p:nvPr/>
+        </p:nvSpPr>
+        <p:spPr>
+          <a:xfrm>
+            <a:off x="6400800" y="1517904"/>
+            <a:ext cx="5340096" cy="237744"/>
+          </a:xfrm>
+          <a:prstGeom prst="rect">
+            <a:avLst/>
+          </a:prstGeom>
+          <a:noFill/>
+        </p:spPr>
+        <p:txBody>
+          <a:bodyPr wrap="square">
+            <a:spAutoFit/>
+          </a:bodyPr>
+          <a:lstStyle/>
+          <a:p>
+            <a:r>
+              <a:rPr sz="950" b="1">
+                <a:solidFill>
+                  <a:srgbClr val="010328"/>
+                </a:solidFill>
+                <a:latin typeface="微软雅黑"/>
+              </a:rPr>
+              <a:t>② pytest 全绿终端输出（逐字捕获）</a:t>
+            </a:r>
+          </a:p>
+        </p:txBody>
+      </p:sp>
+      <p:pic>
+        <p:nvPicPr>
+          <p:cNvPr id="19" name="Picture 18" descr="shot_test.png"/>
+          <p:cNvPicPr>
+            <a:picLocks noChangeAspect="1"/>
+          </p:cNvPicPr>
+          <p:nvPr/>
+        </p:nvPicPr>
+        <p:blipFill>
+          <a:blip r:embed="rId3"/>
+          <a:stretch>
+            <a:fillRect/>
+          </a:stretch>
+        </p:blipFill>
+        <p:spPr>
+          <a:xfrm>
+            <a:off x="6834486" y="1773936"/>
+            <a:ext cx="4472722" cy="1956816"/>
+          </a:xfrm>
+          <a:prstGeom prst="rect">
+            <a:avLst/>
+          </a:prstGeom>
+        </p:spPr>
+      </p:pic>
+      <p:sp>
+        <p:nvSpPr>
+          <p:cNvPr id="20" name="Rectangle 19"/>
+          <p:cNvSpPr/>
+          <p:nvPr/>
+        </p:nvSpPr>
+        <p:spPr>
+          <a:xfrm>
+            <a:off x="457200" y="3877056"/>
+            <a:ext cx="5486400" cy="2304288"/>
+          </a:xfrm>
+          <a:prstGeom prst="rect">
+            <a:avLst/>
+          </a:prstGeom>
+          <a:solidFill>
+            <a:srgbClr val="FFFFFF"/>
+          </a:solidFill>
+          <a:ln>
+            <a:solidFill>
+              <a:srgbClr val="D6DCE4"/>
+            </a:solidFill>
+          </a:ln>
+          <a:effectLst/>
+        </p:spPr>
+        <p:style>
+          <a:lnRef idx="1">
+            <a:schemeClr val="accent1"/>
+          </a:lnRef>
+          <a:fillRef idx="3">
+            <a:schemeClr val="accent1"/>
+          </a:fillRef>
+          <a:effectRef idx="2">
+            <a:schemeClr val="accent1"/>
+          </a:effectRef>
+          <a:fontRef idx="minor">
+            <a:schemeClr val="lt1"/>
+          </a:fontRef>
+        </p:style>
+        <p:txBody>
+          <a:bodyPr rtlCol="0" anchor="ctr" wrap="square"/>
+          <a:lstStyle/>
+          <a:p>
+            <a:pPr algn="ctr"/>
+          </a:p>
+        </p:txBody>
+      </p:sp>
+      <p:sp>
+        <p:nvSpPr>
+          <p:cNvPr id="21" name="TextBox 20"/>
+          <p:cNvSpPr txBox="1"/>
+          <p:nvPr/>
+        </p:nvSpPr>
+        <p:spPr>
+          <a:xfrm>
+            <a:off x="530352" y="3913632"/>
+            <a:ext cx="5340096" cy="237744"/>
+          </a:xfrm>
+          <a:prstGeom prst="rect">
+            <a:avLst/>
+          </a:prstGeom>
+          <a:noFill/>
+        </p:spPr>
+        <p:txBody>
+          <a:bodyPr wrap="square">
+            <a:spAutoFit/>
+          </a:bodyPr>
+          <a:lstStyle/>
+          <a:p>
+            <a:r>
+              <a:rPr sz="950" b="1">
+                <a:solidFill>
+                  <a:srgbClr val="010328"/>
+                </a:solidFill>
+                <a:latin typeface="微软雅黑"/>
+              </a:rPr>
+              <a:t>③ report.txt「验收档位判定（实测）」段</a:t>
+            </a:r>
+          </a:p>
+        </p:txBody>
+      </p:sp>
+      <p:pic>
+        <p:nvPicPr>
+          <p:cNvPr id="22" name="Picture 21" descr="shot_report.png"/>
+          <p:cNvPicPr>
+            <a:picLocks noChangeAspect="1"/>
+          </p:cNvPicPr>
+          <p:nvPr/>
+        </p:nvPicPr>
+        <p:blipFill>
+          <a:blip r:embed="rId4"/>
+          <a:stretch>
+            <a:fillRect/>
+          </a:stretch>
+        </p:blipFill>
+        <p:spPr>
+          <a:xfrm>
+            <a:off x="964038" y="4169664"/>
+            <a:ext cx="4472722" cy="1956816"/>
+          </a:xfrm>
+          <a:prstGeom prst="rect">
+            <a:avLst/>
+          </a:prstGeom>
+        </p:spPr>
+      </p:pic>
+      <p:sp>
+        <p:nvSpPr>
+          <p:cNvPr id="23" name="Rectangle 22"/>
+          <p:cNvSpPr/>
+          <p:nvPr/>
+        </p:nvSpPr>
+        <p:spPr>
+          <a:xfrm>
+            <a:off x="6327648" y="3877056"/>
+            <a:ext cx="5486400" cy="2304288"/>
+          </a:xfrm>
+          <a:prstGeom prst="rect">
+            <a:avLst/>
+          </a:prstGeom>
+          <a:solidFill>
+            <a:srgbClr val="F7F9FB"/>
+          </a:solidFill>
+          <a:ln>
+            <a:solidFill>
+              <a:srgbClr val="D6DCE4"/>
+            </a:solidFill>
+          </a:ln>
+          <a:effectLst/>
+        </p:spPr>
+        <p:style>
+          <a:lnRef idx="1">
+            <a:schemeClr val="accent1"/>
+          </a:lnRef>
+          <a:fillRef idx="3">
+            <a:schemeClr val="accent1"/>
+          </a:fillRef>
+          <a:effectRef idx="2">
+            <a:schemeClr val="accent1"/>
+          </a:effectRef>
+          <a:fontRef idx="minor">
+            <a:schemeClr val="lt1"/>
+          </a:fontRef>
+        </p:style>
+        <p:txBody>
+          <a:bodyPr rtlCol="0" anchor="ctr" wrap="square"/>
+          <a:lstStyle/>
+          <a:p>
+            <a:pPr algn="ctr"/>
+          </a:p>
+        </p:txBody>
+      </p:sp>
+      <p:sp>
+        <p:nvSpPr>
+          <p:cNvPr id="24" name="TextBox 23"/>
+          <p:cNvSpPr txBox="1"/>
+          <p:nvPr/>
+        </p:nvSpPr>
+        <p:spPr>
+          <a:xfrm>
+            <a:off x="6400800" y="3913632"/>
+            <a:ext cx="5340096" cy="237744"/>
+          </a:xfrm>
+          <a:prstGeom prst="rect">
+            <a:avLst/>
+          </a:prstGeom>
+          <a:noFill/>
+        </p:spPr>
+        <p:txBody>
+          <a:bodyPr wrap="square">
+            <a:spAutoFit/>
+          </a:bodyPr>
+          <a:lstStyle/>
+          <a:p>
+            <a:r>
+              <a:rPr sz="950" b="1">
+                <a:solidFill>
+                  <a:srgbClr val="010328"/>
+                </a:solidFill>
+                <a:latin typeface="微软雅黑"/>
+              </a:rPr>
+              <a:t>④ 采集口径（可复现）</a:t>
+            </a:r>
+          </a:p>
+        </p:txBody>
+      </p:sp>
+      <p:sp>
+        <p:nvSpPr>
+          <p:cNvPr id="25" name="TextBox 24"/>
+          <p:cNvSpPr txBox="1"/>
+          <p:nvPr/>
+        </p:nvSpPr>
+        <p:spPr>
+          <a:xfrm>
+            <a:off x="6437376" y="4187952"/>
+            <a:ext cx="5266944" cy="1920240"/>
+          </a:xfrm>
+          <a:prstGeom prst="rect">
+            <a:avLst/>
+          </a:prstGeom>
+          <a:noFill/>
+        </p:spPr>
+        <p:txBody>
+          <a:bodyPr wrap="square">
+            <a:spAutoFit/>
+          </a:bodyPr>
+          <a:lstStyle/>
+          <a:p>
+            <a:r>
+              <a:rPr sz="950" b="0">
+                <a:solidFill>
+                  <a:srgbClr val="2B2F36"/>
+                </a:solidFill>
+                <a:latin typeface="微软雅黑"/>
+              </a:rPr>
+              <a:t>项目：05-AI应用基础48课时版/工程化项目/m31_transfer/</a:t>
+            </a:r>
+          </a:p>
+          <a:p>
+            <a:r>
+              <a:rPr sz="950" b="0">
+                <a:solidFill>
+                  <a:srgbClr val="2B2F36"/>
+                </a:solidFill>
+                <a:latin typeface="微软雅黑"/>
+              </a:rPr>
+              <a:t>命令：/opt/anaconda3/bin/python run.py ｜ /opt/anaconda3/bin/python -m pytest -q</a:t>
+            </a:r>
+          </a:p>
+          <a:p>
+            <a:r>
+              <a:rPr sz="950" b="0">
+                <a:solidFill>
+                  <a:srgbClr val="2B2F36"/>
+                </a:solidFill>
+                <a:latin typeface="微软雅黑"/>
+              </a:rPr>
+              <a:t>采集：工具/ppt97/capture97.py（2026-10-28 10:50 真跑逐字捕获输出）</a:t>
+            </a:r>
+          </a:p>
+          <a:p>
+            <a:r>
+              <a:rPr sz="950" b="0">
+                <a:solidFill>
+                  <a:srgbClr val="2B2F36"/>
+                </a:solidFill>
+                <a:latin typeface="微软雅黑"/>
+              </a:rPr>
+              <a:t>渲染：工具/ppt97/terminal_png.py（终端截图，不改写任何数字）</a:t>
+            </a:r>
+          </a:p>
+          <a:p>
+            <a:r>
+              <a:rPr sz="950" b="0">
+                <a:solidFill>
+                  <a:srgbClr val="2B2F36"/>
+                </a:solidFill>
+                <a:latin typeface="微软雅黑"/>
+              </a:rPr>
+              <a:t>退出码：run=0 ｜ pytest=0</a:t>
+            </a:r>
+          </a:p>
+          <a:p>
+            <a:r>
+              <a:rPr sz="950" b="0">
+                <a:solidFill>
+                  <a:srgbClr val="2B2F36"/>
+                </a:solidFill>
+                <a:latin typeface="微软雅黑"/>
+              </a:rPr>
+              <a:t>档位判定取自 output/report.txt「验收档位判定（实测）」段</a:t>
+            </a:r>
+          </a:p>
+        </p:txBody>
+      </p:sp>
+      <p:sp>
+        <p:nvSpPr>
+          <p:cNvPr id="26" name="TextBox 25"/>
+          <p:cNvSpPr txBox="1"/>
+          <p:nvPr/>
+        </p:nvSpPr>
+        <p:spPr>
+          <a:xfrm>
+            <a:off x="457200" y="6254496"/>
+            <a:ext cx="11247120" cy="201168"/>
+          </a:xfrm>
+          <a:prstGeom prst="rect">
+            <a:avLst/>
+          </a:prstGeom>
+          <a:noFill/>
+        </p:spPr>
+        <p:txBody>
+          <a:bodyPr wrap="square">
+            <a:spAutoFit/>
+          </a:bodyPr>
+          <a:lstStyle/>
+          <a:p>
+            <a:r>
+              <a:rPr sz="900" b="0">
+                <a:solidFill>
+                  <a:srgbClr val="7A8698"/>
+                </a:solidFill>
+                <a:latin typeface="微软雅黑"/>
+              </a:rPr>
+              <a:t>截图内容逐字取自 工具/ppt97/evidence/m31_transfer/（capture97.py 真跑捕获，未改写数字）</a:t>
+            </a:r>
+          </a:p>
+        </p:txBody>
+      </p:sp>
+    </p:spTree>
+  </p:cSld>
+  <p:clrMapOvr>
+    <a:masterClrMapping/>
+  </p:clrMapOvr>
+</p:sld>
+</file>
+
+<file path=ppt/slides/slide66.xml><?xml version="1.0" encoding="utf-8"?>
+<p:sld xmlns:a="http://schemas.openxmlformats.org/drawingml/2006/main" xmlns:p="http://schemas.openxmlformats.org/presentationml/2006/main" xmlns:r="http://schemas.openxmlformats.org/officeDocument/2006/relationships">
+  <p:cSld>
+    <p:spTree>
+      <p:nvGrpSpPr>
+        <p:cNvPr id="1" name=""/>
+        <p:cNvGrpSpPr/>
+        <p:nvPr/>
+      </p:nvGrpSpPr>
+      <p:grpSpPr/>
+      <p:sp>
+        <p:nvSpPr>
+          <p:cNvPr id="2" name="Rectangle 1"/>
+          <p:cNvSpPr/>
+          <p:nvPr/>
+        </p:nvSpPr>
+        <p:spPr>
+          <a:xfrm>
+            <a:off x="0" y="0"/>
+            <a:ext cx="12192000" cy="1150000"/>
+          </a:xfrm>
+          <a:prstGeom prst="rect">
+            <a:avLst/>
+          </a:prstGeom>
+          <a:solidFill>
+            <a:srgbClr val="010328"/>
+          </a:solidFill>
+          <a:ln>
+            <a:noFill/>
+          </a:ln>
+          <a:effectLst/>
+        </p:spPr>
+        <p:style>
+          <a:lnRef idx="1">
+            <a:schemeClr val="accent1"/>
+          </a:lnRef>
+          <a:fillRef idx="3">
+            <a:schemeClr val="accent1"/>
+          </a:fillRef>
+          <a:effectRef idx="2">
+            <a:schemeClr val="accent1"/>
+          </a:effectRef>
+          <a:fontRef idx="minor">
+            <a:schemeClr val="lt1"/>
+          </a:fontRef>
+        </p:style>
+        <p:txBody>
+          <a:bodyPr rtlCol="0" anchor="ctr"/>
+          <a:lstStyle/>
+          <a:p>
+            <a:pPr algn="ctr"/>
+          </a:p>
+        </p:txBody>
+      </p:sp>
+      <p:sp>
+        <p:nvSpPr>
+          <p:cNvPr id="3" name="Rectangle 2"/>
+          <p:cNvSpPr/>
+          <p:nvPr/>
+        </p:nvSpPr>
+        <p:spPr>
+          <a:xfrm>
+            <a:off x="0" y="1150000"/>
+            <a:ext cx="2600000" cy="70000"/>
+          </a:xfrm>
+          <a:prstGeom prst="rect">
+            <a:avLst/>
+          </a:prstGeom>
+          <a:solidFill>
+            <a:srgbClr val="F5670F"/>
+          </a:solidFill>
+          <a:ln>
+            <a:noFill/>
+          </a:ln>
+          <a:effectLst/>
+        </p:spPr>
+        <p:style>
+          <a:lnRef idx="1">
+            <a:schemeClr val="accent1"/>
+          </a:lnRef>
+          <a:fillRef idx="3">
+            <a:schemeClr val="accent1"/>
+          </a:fillRef>
+          <a:effectRef idx="2">
+            <a:schemeClr val="accent1"/>
+          </a:effectRef>
+          <a:fontRef idx="minor">
+            <a:schemeClr val="lt1"/>
+          </a:fontRef>
+        </p:style>
+        <p:txBody>
+          <a:bodyPr rtlCol="0" anchor="ctr"/>
+          <a:lstStyle/>
+          <a:p>
+            <a:pPr algn="ctr"/>
+          </a:p>
+        </p:txBody>
+      </p:sp>
+      <p:sp>
+        <p:nvSpPr>
+          <p:cNvPr id="4" name="TextBox 3"/>
+          <p:cNvSpPr txBox="1"/>
+          <p:nvPr/>
+        </p:nvSpPr>
+        <p:spPr>
+          <a:xfrm>
+            <a:off x="700000" y="300000"/>
+            <a:ext cx="10792000" cy="700000"/>
+          </a:xfrm>
+          <a:prstGeom prst="rect">
+            <a:avLst/>
+          </a:prstGeom>
+          <a:noFill/>
+        </p:spPr>
+        <p:txBody>
+          <a:bodyPr wrap="square" anchor="t">
+            <a:spAutoFit/>
+          </a:bodyPr>
+          <a:lstStyle/>
+          <a:p>
+            <a:pPr algn="l">
+              <a:lnSpc>
+                <a:spcPct val="110000"/>
+              </a:lnSpc>
+              <a:spcAft>
+                <a:spcPts val="600"/>
+              </a:spcAft>
+            </a:pPr>
+            <a:r>
+              <a:rPr sz="2400" b="1">
+                <a:solidFill>
+                  <a:srgbClr val="FFFFFF"/>
+                </a:solidFill>
+                <a:latin typeface="微软雅黑"/>
+              </a:rPr>
+              <a:t>产出图证据 · m31_transfer</a:t>
+            </a:r>
+          </a:p>
+        </p:txBody>
+      </p:sp>
+      <p:sp>
+        <p:nvSpPr>
+          <p:cNvPr id="11" name="Rectangle 10"/>
+          <p:cNvSpPr/>
+          <p:nvPr/>
+        </p:nvSpPr>
+        <p:spPr>
+          <a:xfrm>
+            <a:off x="500000" y="6500000"/>
+            <a:ext cx="11100000" cy="20000"/>
+          </a:xfrm>
+          <a:prstGeom prst="rect">
+            <a:avLst/>
+          </a:prstGeom>
+          <a:solidFill>
+            <a:srgbClr val="C9D4EE"/>
+          </a:solidFill>
+          <a:ln>
+            <a:noFill/>
+          </a:ln>
+          <a:effectLst/>
+        </p:spPr>
+        <p:style>
+          <a:lnRef idx="1">
+            <a:schemeClr val="accent1"/>
+          </a:lnRef>
+          <a:fillRef idx="3">
+            <a:schemeClr val="accent1"/>
+          </a:fillRef>
+          <a:effectRef idx="2">
+            <a:schemeClr val="accent1"/>
+          </a:effectRef>
+          <a:fontRef idx="minor">
+            <a:schemeClr val="lt1"/>
+          </a:fontRef>
+        </p:style>
+        <p:txBody>
+          <a:bodyPr rtlCol="0" anchor="ctr"/>
+          <a:lstStyle/>
+          <a:p>
+            <a:pPr algn="ctr"/>
+          </a:p>
+        </p:txBody>
+      </p:sp>
+      <p:sp>
+        <p:nvSpPr>
+          <p:cNvPr id="12" name="TextBox 11"/>
+          <p:cNvSpPr txBox="1"/>
+          <p:nvPr/>
+        </p:nvSpPr>
+        <p:spPr>
+          <a:xfrm>
+            <a:off x="500000" y="6540000"/>
+            <a:ext cx="7000000" cy="300000"/>
+          </a:xfrm>
+          <a:prstGeom prst="rect">
+            <a:avLst/>
+          </a:prstGeom>
+          <a:noFill/>
+        </p:spPr>
+        <p:txBody>
+          <a:bodyPr wrap="square" anchor="t">
+            <a:spAutoFit/>
+          </a:bodyPr>
+          <a:lstStyle/>
+          <a:p>
+            <a:pPr algn="l">
+              <a:lnSpc>
+                <a:spcPct val="110000"/>
+              </a:lnSpc>
+              <a:spcAft>
+                <a:spcPts val="600"/>
+              </a:spcAft>
+            </a:pPr>
+            <a:r>
+              <a:rPr sz="1000" b="0">
+                <a:solidFill>
+                  <a:srgbClr val="8A97B5"/>
+                </a:solidFill>
+                <a:latin typeface="微软雅黑"/>
+              </a:rPr>
+              <a:t>两江智造集团 · AI应用基础48课时版</a:t>
+            </a:r>
+          </a:p>
+        </p:txBody>
+      </p:sp>
+      <p:sp>
+        <p:nvSpPr>
+          <p:cNvPr id="13" name="TextBox 12"/>
+          <p:cNvSpPr txBox="1"/>
+          <p:nvPr/>
+        </p:nvSpPr>
+        <p:spPr>
+          <a:xfrm>
+            <a:off x="10600000" y="6540000"/>
+            <a:ext cx="1000000" cy="300000"/>
+          </a:xfrm>
+          <a:prstGeom prst="rect">
+            <a:avLst/>
+          </a:prstGeom>
+          <a:noFill/>
+        </p:spPr>
+        <p:txBody>
+          <a:bodyPr wrap="square" anchor="t">
+            <a:spAutoFit/>
+          </a:bodyPr>
+          <a:lstStyle/>
+          <a:p>
+            <a:pPr algn="r">
+              <a:lnSpc>
+                <a:spcPct val="110000"/>
+              </a:lnSpc>
+              <a:spcAft>
+                <a:spcPts val="600"/>
+              </a:spcAft>
+            </a:pPr>
+            <a:r>
+              <a:rPr sz="1000" b="0">
+                <a:solidFill>
+                  <a:srgbClr val="8A97B5"/>
+                </a:solidFill>
+                <a:latin typeface="微软雅黑"/>
+              </a:rPr>
+              <a:t>40 / 66</a:t>
+            </a:r>
+          </a:p>
+        </p:txBody>
+      </p:sp>
+      <p:sp>
+        <p:nvSpPr>
+          <p:cNvPr id="14" name="Rectangle 13"/>
+          <p:cNvSpPr/>
+          <p:nvPr/>
+        </p:nvSpPr>
+        <p:spPr>
+          <a:xfrm>
+            <a:off x="457200" y="1481328"/>
+            <a:ext cx="11356848" cy="4663440"/>
+          </a:xfrm>
+          <a:prstGeom prst="rect">
+            <a:avLst/>
+          </a:prstGeom>
+          <a:solidFill>
+            <a:srgbClr val="FFFFFF"/>
+          </a:solidFill>
+          <a:ln>
+            <a:solidFill>
+              <a:srgbClr val="D6DCE4"/>
+            </a:solidFill>
+          </a:ln>
+          <a:effectLst/>
+        </p:spPr>
+        <p:style>
+          <a:lnRef idx="1">
+            <a:schemeClr val="accent1"/>
+          </a:lnRef>
+          <a:fillRef idx="3">
+            <a:schemeClr val="accent1"/>
+          </a:fillRef>
+          <a:effectRef idx="2">
+            <a:schemeClr val="accent1"/>
+          </a:effectRef>
+          <a:fontRef idx="minor">
+            <a:schemeClr val="lt1"/>
+          </a:fontRef>
+        </p:style>
+        <p:txBody>
+          <a:bodyPr rtlCol="0" anchor="ctr" wrap="square"/>
+          <a:lstStyle/>
+          <a:p>
+            <a:pPr algn="ctr"/>
+          </a:p>
+        </p:txBody>
+      </p:sp>
+      <p:sp>
+        <p:nvSpPr>
+          <p:cNvPr id="15" name="TextBox 14"/>
+          <p:cNvSpPr txBox="1"/>
+          <p:nvPr/>
+        </p:nvSpPr>
+        <p:spPr>
+          <a:xfrm>
+            <a:off x="530352" y="1517904"/>
+            <a:ext cx="11210544" cy="237744"/>
+          </a:xfrm>
+          <a:prstGeom prst="rect">
+            <a:avLst/>
+          </a:prstGeom>
+          <a:noFill/>
+        </p:spPr>
+        <p:txBody>
+          <a:bodyPr wrap="square">
+            <a:spAutoFit/>
+          </a:bodyPr>
+          <a:lstStyle/>
+          <a:p>
+            <a:r>
+              <a:rPr sz="950" b="1">
+                <a:solidFill>
+                  <a:srgbClr val="010328"/>
+                </a:solidFill>
+                <a:latin typeface="微软雅黑"/>
+              </a:rPr>
+              <a:t>产出图 · training_curves.png</a:t>
+            </a:r>
+          </a:p>
+        </p:txBody>
+      </p:sp>
+      <p:sp>
+        <p:nvSpPr>
+          <p:cNvPr id="16" name="TextBox 15"/>
+          <p:cNvSpPr txBox="1"/>
+          <p:nvPr/>
+        </p:nvSpPr>
+        <p:spPr>
+          <a:xfrm>
+            <a:off x="530352" y="1755648"/>
+            <a:ext cx="11210544" cy="201168"/>
+          </a:xfrm>
+          <a:prstGeom prst="rect">
+            <a:avLst/>
+          </a:prstGeom>
+          <a:noFill/>
+        </p:spPr>
+        <p:txBody>
+          <a:bodyPr wrap="square">
+            <a:spAutoFit/>
+          </a:bodyPr>
+          <a:lstStyle/>
+          <a:p>
+            <a:r>
+              <a:rPr sz="850" b="0">
+                <a:solidFill>
+                  <a:srgbClr val="7A8698"/>
+                </a:solidFill>
+                <a:latin typeface="微软雅黑"/>
+              </a:rPr>
+              <a:t>output/training_curves.png ｜ 48 KB ｜ run.py 本次落盘</a:t>
+            </a:r>
+          </a:p>
+        </p:txBody>
+      </p:sp>
+      <p:pic>
+        <p:nvPicPr>
+          <p:cNvPr id="17" name="Picture 16" descr="training_curves.png"/>
+          <p:cNvPicPr>
+            <a:picLocks noChangeAspect="1"/>
+          </p:cNvPicPr>
+          <p:nvPr/>
+        </p:nvPicPr>
+        <p:blipFill>
+          <a:blip r:embed="rId2"/>
+          <a:stretch>
+            <a:fillRect/>
+          </a:stretch>
+        </p:blipFill>
+        <p:spPr>
+          <a:xfrm>
+            <a:off x="2963672" y="1993392"/>
+            <a:ext cx="6343904" cy="4078224"/>
+          </a:xfrm>
+          <a:prstGeom prst="rect">
+            <a:avLst/>
+          </a:prstGeom>
+        </p:spPr>
+      </p:pic>
+      <p:sp>
+        <p:nvSpPr>
+          <p:cNvPr id="18" name="TextBox 17"/>
+          <p:cNvSpPr txBox="1"/>
+          <p:nvPr/>
+        </p:nvSpPr>
+        <p:spPr>
+          <a:xfrm>
+            <a:off x="457200" y="6254496"/>
+            <a:ext cx="11247120" cy="201168"/>
+          </a:xfrm>
+          <a:prstGeom prst="rect">
+            <a:avLst/>
+          </a:prstGeom>
+          <a:noFill/>
+        </p:spPr>
+        <p:txBody>
+          <a:bodyPr wrap="square">
+            <a:spAutoFit/>
+          </a:bodyPr>
+          <a:lstStyle/>
+          <a:p>
+            <a:r>
+              <a:rPr sz="900" b="0">
+                <a:solidFill>
+                  <a:srgbClr val="7A8698"/>
+                </a:solidFill>
+                <a:latin typeface="微软雅黑"/>
+              </a:rPr>
+              <a:t>以上图像由 run.py 本次运行落盘到 output/，非外部素材。</a:t>
+            </a:r>
+          </a:p>
+        </p:txBody>
+      </p:sp>
+    </p:spTree>
+  </p:cSld>
+  <p:clrMapOvr>
+    <a:masterClrMapping/>
+  </p:clrMapOvr>
+</p:sld>
+</file>
+
 <file path=ppt/slides/slide7.xml><?xml version="1.0" encoding="utf-8"?>
 <p:sld xmlns:a="http://schemas.openxmlformats.org/drawingml/2006/main" xmlns:p="http://schemas.openxmlformats.org/presentationml/2006/main" xmlns:r="http://schemas.openxmlformats.org/officeDocument/2006/relationships">
   <p:cSld>
@@ -59547,7 +62148,7 @@
                 </a:solidFill>
                 <a:latin typeface="微软雅黑"/>
               </a:rPr>
-              <a:t>7 / 63</a:t>
+              <a:t>7 / 66</a:t>
             </a:r>
           </a:p>
         </p:txBody>
@@ -60519,7 +63120,7 @@
                 </a:solidFill>
                 <a:latin typeface="微软雅黑"/>
               </a:rPr>
-              <a:t>8 / 63</a:t>
+              <a:t>8 / 66</a:t>
             </a:r>
           </a:p>
         </p:txBody>
@@ -61374,7 +63975,7 @@
                 </a:solidFill>
                 <a:latin typeface="微软雅黑"/>
               </a:rPr>
-              <a:t>9 / 63</a:t>
+              <a:t>9 / 66</a:t>
             </a:r>
           </a:p>
         </p:txBody>
